--- a/docs/双链笔记系统-答辩PPT.pptx
+++ b/docs/双链笔记系统-答辩PPT.pptx
@@ -5,19 +5,20 @@
     <p:sldMasterId id="2147483648" r:id="rId1"/>
   </p:sldMasterIdLst>
   <p:notesMasterIdLst>
-    <p:notesMasterId r:id="rId12"/>
+    <p:notesMasterId r:id="rId13"/>
   </p:notesMasterIdLst>
   <p:sldIdLst>
     <p:sldId id="256" r:id="rId2"/>
-    <p:sldId id="257" r:id="rId3"/>
-    <p:sldId id="258" r:id="rId4"/>
-    <p:sldId id="259" r:id="rId5"/>
-    <p:sldId id="260" r:id="rId6"/>
-    <p:sldId id="261" r:id="rId7"/>
-    <p:sldId id="262" r:id="rId8"/>
-    <p:sldId id="264" r:id="rId9"/>
-    <p:sldId id="265" r:id="rId10"/>
-    <p:sldId id="266" r:id="rId11"/>
+    <p:sldId id="267" r:id="rId3"/>
+    <p:sldId id="257" r:id="rId4"/>
+    <p:sldId id="258" r:id="rId5"/>
+    <p:sldId id="259" r:id="rId6"/>
+    <p:sldId id="260" r:id="rId7"/>
+    <p:sldId id="261" r:id="rId8"/>
+    <p:sldId id="262" r:id="rId9"/>
+    <p:sldId id="264" r:id="rId10"/>
+    <p:sldId id="265" r:id="rId11"/>
+    <p:sldId id="266" r:id="rId12"/>
   </p:sldIdLst>
   <p:sldSz cx="12192000" cy="6858000"/>
   <p:notesSz cx="6858000" cy="12192000"/>
@@ -125,8 +126,8 @@
 <pc:chgInfo xmlns:a="http://schemas.openxmlformats.org/drawingml/2006/main" xmlns:r="http://schemas.openxmlformats.org/officeDocument/2006/relationships" xmlns:ac="http://schemas.microsoft.com/office/drawing/2013/main/command" xmlns:pc="http://schemas.microsoft.com/office/powerpoint/2013/main/command">
   <pc:docChgLst>
     <pc:chgData name="锦润 王" userId="f2c1ae758e50804f" providerId="LiveId" clId="{7D7F201C-E68E-43E9-A2FB-34FF755966BF}"/>
-    <pc:docChg chg="undo custSel mod addSld delSld modSld addMainMaster delMainMaster modMainMaster modNotesMaster setSldSz">
-      <pc:chgData name="锦润 王" userId="f2c1ae758e50804f" providerId="LiveId" clId="{7D7F201C-E68E-43E9-A2FB-34FF755966BF}" dt="2026-04-24T05:13:03.078" v="228" actId="14100"/>
+    <pc:docChg chg="undo custSel mod addSld delSld modSld sldOrd addMainMaster delMainMaster modMainMaster modNotesMaster setSldSz">
+      <pc:chgData name="锦润 王" userId="f2c1ae758e50804f" providerId="LiveId" clId="{7D7F201C-E68E-43E9-A2FB-34FF755966BF}" dt="2026-04-25T00:53:52.247" v="240" actId="26606"/>
       <pc:docMkLst>
         <pc:docMk/>
       </pc:docMkLst>
@@ -687,6 +688,21 @@
           </ac:picMkLst>
         </pc:picChg>
       </pc:sldChg>
+      <pc:sldChg chg="modSp add mod ord">
+        <pc:chgData name="锦润 王" userId="f2c1ae758e50804f" providerId="LiveId" clId="{7D7F201C-E68E-43E9-A2FB-34FF755966BF}" dt="2026-04-25T00:53:52.247" v="240" actId="26606"/>
+        <pc:sldMkLst>
+          <pc:docMk/>
+          <pc:sldMk cId="0" sldId="267"/>
+        </pc:sldMkLst>
+        <pc:spChg chg="mod">
+          <ac:chgData name="锦润 王" userId="f2c1ae758e50804f" providerId="LiveId" clId="{7D7F201C-E68E-43E9-A2FB-34FF755966BF}" dt="2026-04-25T00:53:52.247" v="240" actId="26606"/>
+          <ac:spMkLst>
+            <pc:docMk/>
+            <pc:sldMk cId="0" sldId="267"/>
+            <ac:spMk id="9" creationId="{00000000-0000-0000-0000-000000000000}"/>
+          </ac:spMkLst>
+        </pc:spChg>
+      </pc:sldChg>
       <pc:sldChg chg="delSp modSp del mod replId">
         <pc:chgData name="锦润 王" userId="f2c1ae758e50804f" providerId="LiveId" clId="{7D7F201C-E68E-43E9-A2FB-34FF755966BF}" dt="2026-04-24T02:57:21.322" v="7" actId="26606"/>
         <pc:sldMkLst>
@@ -1161,7 +1177,7 @@
           <a:p>
             <a:fld id="{F7021451-1387-4CA6-816F-3879F97B5CBC}" type="slidenum">
               <a:rPr lang="en-US"/>
-              <a:t>10</a:t>
+              <a:t>11</a:t>
             </a:fld>
             <a:endParaRPr lang="en-US"/>
           </a:p>
@@ -1245,7 +1261,7 @@
           <a:p>
             <a:fld id="{F7021451-1387-4CA6-816F-3879F97B5CBC}" type="slidenum">
               <a:rPr lang="en-US"/>
-              <a:t>2</a:t>
+              <a:t>3</a:t>
             </a:fld>
             <a:endParaRPr lang="en-US"/>
           </a:p>
@@ -1329,7 +1345,7 @@
           <a:p>
             <a:fld id="{F7021451-1387-4CA6-816F-3879F97B5CBC}" type="slidenum">
               <a:rPr lang="en-US"/>
-              <a:t>3</a:t>
+              <a:t>4</a:t>
             </a:fld>
             <a:endParaRPr lang="en-US"/>
           </a:p>
@@ -1413,7 +1429,7 @@
           <a:p>
             <a:fld id="{F7021451-1387-4CA6-816F-3879F97B5CBC}" type="slidenum">
               <a:rPr lang="en-US"/>
-              <a:t>4</a:t>
+              <a:t>5</a:t>
             </a:fld>
             <a:endParaRPr lang="en-US"/>
           </a:p>
@@ -1497,7 +1513,7 @@
           <a:p>
             <a:fld id="{F7021451-1387-4CA6-816F-3879F97B5CBC}" type="slidenum">
               <a:rPr lang="en-US"/>
-              <a:t>5</a:t>
+              <a:t>6</a:t>
             </a:fld>
             <a:endParaRPr lang="en-US"/>
           </a:p>
@@ -1581,7 +1597,7 @@
           <a:p>
             <a:fld id="{F7021451-1387-4CA6-816F-3879F97B5CBC}" type="slidenum">
               <a:rPr lang="en-US"/>
-              <a:t>6</a:t>
+              <a:t>7</a:t>
             </a:fld>
             <a:endParaRPr lang="en-US"/>
           </a:p>
@@ -1665,7 +1681,7 @@
           <a:p>
             <a:fld id="{F7021451-1387-4CA6-816F-3879F97B5CBC}" type="slidenum">
               <a:rPr lang="en-US"/>
-              <a:t>7</a:t>
+              <a:t>8</a:t>
             </a:fld>
             <a:endParaRPr lang="en-US"/>
           </a:p>
@@ -1749,7 +1765,7 @@
           <a:p>
             <a:fld id="{F7021451-1387-4CA6-816F-3879F97B5CBC}" type="slidenum">
               <a:rPr lang="en-US"/>
-              <a:t>8</a:t>
+              <a:t>9</a:t>
             </a:fld>
             <a:endParaRPr lang="en-US"/>
           </a:p>
@@ -1833,7 +1849,7 @@
           <a:p>
             <a:fld id="{F7021451-1387-4CA6-816F-3879F97B5CBC}" type="slidenum">
               <a:rPr lang="en-US"/>
-              <a:t>9</a:t>
+              <a:t>10</a:t>
             </a:fld>
             <a:endParaRPr lang="en-US"/>
           </a:p>
@@ -3043,6 +3059,1551 @@
 
 <file path=ppt/slides/slide10.xml><?xml version="1.0" encoding="utf-8"?>
 <p:sld xmlns:a="http://schemas.openxmlformats.org/drawingml/2006/main" xmlns:r="http://schemas.openxmlformats.org/officeDocument/2006/relationships" xmlns:p="http://schemas.openxmlformats.org/presentationml/2006/main">
+  <p:cSld name="Slide 10">
+    <p:bg>
+      <p:bgPr>
+        <a:solidFill>
+          <a:srgbClr val="FDF7F0"/>
+        </a:solidFill>
+        <a:effectLst/>
+      </p:bgPr>
+    </p:bg>
+    <p:spTree>
+      <p:nvGrpSpPr>
+        <p:cNvPr id="1" name=""/>
+        <p:cNvGrpSpPr/>
+        <p:nvPr/>
+      </p:nvGrpSpPr>
+      <p:grpSpPr>
+        <a:xfrm>
+          <a:off x="0" y="0"/>
+          <a:ext cx="0" cy="0"/>
+          <a:chOff x="0" y="0"/>
+          <a:chExt cx="0" cy="0"/>
+        </a:xfrm>
+      </p:grpSpPr>
+      <p:sp>
+        <p:nvSpPr>
+          <p:cNvPr id="2" name="Shape 0"/>
+          <p:cNvSpPr/>
+          <p:nvPr/>
+        </p:nvSpPr>
+        <p:spPr>
+          <a:xfrm>
+            <a:off x="457200" y="502920"/>
+            <a:ext cx="109728" cy="457200"/>
+          </a:xfrm>
+          <a:prstGeom prst="rect">
+            <a:avLst/>
+          </a:prstGeom>
+          <a:solidFill>
+            <a:srgbClr val="C69266"/>
+          </a:solidFill>
+          <a:ln w="12700">
+            <a:solidFill>
+              <a:srgbClr val="C69266"/>
+            </a:solidFill>
+            <a:prstDash val="solid"/>
+          </a:ln>
+        </p:spPr>
+        <p:txBody>
+          <a:bodyPr/>
+          <a:lstStyle/>
+          <a:p>
+            <a:endParaRPr lang="zh-CN" altLang="en-US"/>
+          </a:p>
+        </p:txBody>
+      </p:sp>
+      <p:sp>
+        <p:nvSpPr>
+          <p:cNvPr id="3" name="Text 1"/>
+          <p:cNvSpPr/>
+          <p:nvPr/>
+        </p:nvSpPr>
+        <p:spPr>
+          <a:xfrm>
+            <a:off x="685800" y="365760"/>
+            <a:ext cx="9601200" cy="640080"/>
+          </a:xfrm>
+          <a:prstGeom prst="rect">
+            <a:avLst/>
+          </a:prstGeom>
+          <a:noFill/>
+          <a:ln/>
+        </p:spPr>
+        <p:txBody>
+          <a:bodyPr wrap="square" rtlCol="0" anchor="ctr"/>
+          <a:lstStyle/>
+          <a:p>
+            <a:pPr marL="0" indent="0">
+              <a:buNone/>
+            </a:pPr>
+            <a:r>
+              <a:rPr lang="en-US" sz="2600" b="1" dirty="0">
+                <a:solidFill>
+                  <a:srgbClr val="1A2B5C"/>
+                </a:solidFill>
+                <a:latin typeface="Microsoft YaHei" pitchFamily="34" charset="0"/>
+                <a:ea typeface="Microsoft YaHei" pitchFamily="34" charset="-122"/>
+                <a:cs typeface="Microsoft YaHei" pitchFamily="34" charset="-120"/>
+              </a:rPr>
+              <a:t>不足与后续改进方向</a:t>
+            </a:r>
+            <a:endParaRPr lang="en-US" sz="2600" dirty="0"/>
+          </a:p>
+        </p:txBody>
+      </p:sp>
+      <p:sp>
+        <p:nvSpPr>
+          <p:cNvPr id="4" name="Text 2"/>
+          <p:cNvSpPr/>
+          <p:nvPr/>
+        </p:nvSpPr>
+        <p:spPr>
+          <a:xfrm>
+            <a:off x="10332720" y="457200"/>
+            <a:ext cx="1463040" cy="457200"/>
+          </a:xfrm>
+          <a:prstGeom prst="rect">
+            <a:avLst/>
+          </a:prstGeom>
+          <a:noFill/>
+          <a:ln/>
+        </p:spPr>
+        <p:txBody>
+          <a:bodyPr wrap="square" rtlCol="0" anchor="ctr"/>
+          <a:lstStyle/>
+          <a:p>
+            <a:pPr marL="0" indent="0" algn="r">
+              <a:buNone/>
+            </a:pPr>
+            <a:r>
+              <a:rPr lang="en-US" sz="1100" dirty="0">
+                <a:solidFill>
+                  <a:srgbClr val="6B7280"/>
+                </a:solidFill>
+                <a:latin typeface="Microsoft YaHei" pitchFamily="34" charset="0"/>
+                <a:ea typeface="Microsoft YaHei" pitchFamily="34" charset="-122"/>
+                <a:cs typeface="Microsoft YaHei" pitchFamily="34" charset="-120"/>
+              </a:rPr>
+              <a:t>09 / 改进方向</a:t>
+            </a:r>
+            <a:endParaRPr lang="en-US" sz="1100" dirty="0"/>
+          </a:p>
+        </p:txBody>
+      </p:sp>
+      <p:sp>
+        <p:nvSpPr>
+          <p:cNvPr id="5" name="Shape 3"/>
+          <p:cNvSpPr/>
+          <p:nvPr/>
+        </p:nvSpPr>
+        <p:spPr>
+          <a:xfrm>
+            <a:off x="457200" y="1097280"/>
+            <a:ext cx="11277295" cy="0"/>
+          </a:xfrm>
+          <a:prstGeom prst="line">
+            <a:avLst/>
+          </a:prstGeom>
+          <a:noFill/>
+          <a:ln w="9525">
+            <a:solidFill>
+              <a:srgbClr val="D9CDBF"/>
+            </a:solidFill>
+            <a:prstDash val="solid"/>
+          </a:ln>
+        </p:spPr>
+        <p:txBody>
+          <a:bodyPr/>
+          <a:lstStyle/>
+          <a:p>
+            <a:endParaRPr lang="zh-CN" altLang="en-US"/>
+          </a:p>
+        </p:txBody>
+      </p:sp>
+      <p:sp>
+        <p:nvSpPr>
+          <p:cNvPr id="6" name="Shape 4"/>
+          <p:cNvSpPr/>
+          <p:nvPr/>
+        </p:nvSpPr>
+        <p:spPr>
+          <a:xfrm>
+            <a:off x="457200" y="1371600"/>
+            <a:ext cx="5486400" cy="4206240"/>
+          </a:xfrm>
+          <a:prstGeom prst="roundRect">
+            <a:avLst>
+              <a:gd name="adj" fmla="val 1739"/>
+            </a:avLst>
+          </a:prstGeom>
+          <a:solidFill>
+            <a:srgbClr val="F6ECE0"/>
+          </a:solidFill>
+          <a:ln w="9525">
+            <a:solidFill>
+              <a:srgbClr val="D9CDBF"/>
+            </a:solidFill>
+            <a:prstDash val="solid"/>
+          </a:ln>
+        </p:spPr>
+        <p:txBody>
+          <a:bodyPr/>
+          <a:lstStyle/>
+          <a:p>
+            <a:endParaRPr lang="zh-CN" altLang="en-US"/>
+          </a:p>
+        </p:txBody>
+      </p:sp>
+      <p:sp>
+        <p:nvSpPr>
+          <p:cNvPr id="7" name="Shape 5"/>
+          <p:cNvSpPr/>
+          <p:nvPr/>
+        </p:nvSpPr>
+        <p:spPr>
+          <a:xfrm>
+            <a:off x="457200" y="1371600"/>
+            <a:ext cx="5486400" cy="91440"/>
+          </a:xfrm>
+          <a:prstGeom prst="rect">
+            <a:avLst/>
+          </a:prstGeom>
+          <a:solidFill>
+            <a:srgbClr val="C69266"/>
+          </a:solidFill>
+          <a:ln w="12700">
+            <a:solidFill>
+              <a:srgbClr val="C69266"/>
+            </a:solidFill>
+            <a:prstDash val="solid"/>
+          </a:ln>
+        </p:spPr>
+        <p:txBody>
+          <a:bodyPr/>
+          <a:lstStyle/>
+          <a:p>
+            <a:endParaRPr lang="zh-CN" altLang="en-US"/>
+          </a:p>
+        </p:txBody>
+      </p:sp>
+      <p:sp>
+        <p:nvSpPr>
+          <p:cNvPr id="8" name="Text 6"/>
+          <p:cNvSpPr/>
+          <p:nvPr/>
+        </p:nvSpPr>
+        <p:spPr>
+          <a:xfrm>
+            <a:off x="731520" y="1600200"/>
+            <a:ext cx="4937760" cy="457200"/>
+          </a:xfrm>
+          <a:prstGeom prst="rect">
+            <a:avLst/>
+          </a:prstGeom>
+          <a:noFill/>
+          <a:ln/>
+        </p:spPr>
+        <p:txBody>
+          <a:bodyPr wrap="square" rtlCol="0" anchor="ctr"/>
+          <a:lstStyle/>
+          <a:p>
+            <a:pPr marL="0" indent="0">
+              <a:buNone/>
+            </a:pPr>
+            <a:r>
+              <a:rPr lang="en-US" sz="1800" b="1" dirty="0">
+                <a:solidFill>
+                  <a:srgbClr val="1A2B5C"/>
+                </a:solidFill>
+                <a:latin typeface="Microsoft YaHei" pitchFamily="34" charset="0"/>
+                <a:ea typeface="Microsoft YaHei" pitchFamily="34" charset="-122"/>
+                <a:cs typeface="Microsoft YaHei" pitchFamily="34" charset="-120"/>
+              </a:rPr>
+              <a:t>当前不足</a:t>
+            </a:r>
+            <a:endParaRPr lang="en-US" sz="1800" dirty="0"/>
+          </a:p>
+        </p:txBody>
+      </p:sp>
+      <p:sp>
+        <p:nvSpPr>
+          <p:cNvPr id="9" name="Shape 7"/>
+          <p:cNvSpPr/>
+          <p:nvPr/>
+        </p:nvSpPr>
+        <p:spPr>
+          <a:xfrm>
+            <a:off x="731520" y="2194560"/>
+            <a:ext cx="384048" cy="384048"/>
+          </a:xfrm>
+          <a:prstGeom prst="roundRect">
+            <a:avLst>
+              <a:gd name="adj" fmla="val 19048"/>
+            </a:avLst>
+          </a:prstGeom>
+          <a:solidFill>
+            <a:srgbClr val="C69266"/>
+          </a:solidFill>
+          <a:ln w="12700">
+            <a:solidFill>
+              <a:srgbClr val="C69266"/>
+            </a:solidFill>
+            <a:prstDash val="solid"/>
+          </a:ln>
+        </p:spPr>
+        <p:txBody>
+          <a:bodyPr/>
+          <a:lstStyle/>
+          <a:p>
+            <a:endParaRPr lang="zh-CN" altLang="en-US"/>
+          </a:p>
+        </p:txBody>
+      </p:sp>
+      <p:sp>
+        <p:nvSpPr>
+          <p:cNvPr id="10" name="Text 8"/>
+          <p:cNvSpPr/>
+          <p:nvPr/>
+        </p:nvSpPr>
+        <p:spPr>
+          <a:xfrm>
+            <a:off x="731520" y="2194560"/>
+            <a:ext cx="384048" cy="384048"/>
+          </a:xfrm>
+          <a:prstGeom prst="rect">
+            <a:avLst/>
+          </a:prstGeom>
+          <a:noFill/>
+          <a:ln/>
+        </p:spPr>
+        <p:txBody>
+          <a:bodyPr wrap="square" rtlCol="0" anchor="ctr"/>
+          <a:lstStyle/>
+          <a:p>
+            <a:pPr marL="0" indent="0" algn="ctr">
+              <a:buNone/>
+            </a:pPr>
+            <a:r>
+              <a:rPr lang="en-US" sz="1300" b="1" dirty="0">
+                <a:solidFill>
+                  <a:srgbClr val="FFFFFF"/>
+                </a:solidFill>
+                <a:latin typeface="Georgia" pitchFamily="34" charset="0"/>
+                <a:ea typeface="Georgia" pitchFamily="34" charset="-122"/>
+                <a:cs typeface="Georgia" pitchFamily="34" charset="-120"/>
+              </a:rPr>
+              <a:t>1</a:t>
+            </a:r>
+            <a:endParaRPr lang="en-US" sz="1300" dirty="0"/>
+          </a:p>
+        </p:txBody>
+      </p:sp>
+      <p:sp>
+        <p:nvSpPr>
+          <p:cNvPr id="11" name="Text 9"/>
+          <p:cNvSpPr/>
+          <p:nvPr/>
+        </p:nvSpPr>
+        <p:spPr>
+          <a:xfrm>
+            <a:off x="1234440" y="2148840"/>
+            <a:ext cx="4434840" cy="502920"/>
+          </a:xfrm>
+          <a:prstGeom prst="rect">
+            <a:avLst/>
+          </a:prstGeom>
+          <a:noFill/>
+          <a:ln/>
+        </p:spPr>
+        <p:txBody>
+          <a:bodyPr wrap="square" rtlCol="0" anchor="ctr"/>
+          <a:lstStyle/>
+          <a:p>
+            <a:pPr marL="0" indent="0">
+              <a:buNone/>
+            </a:pPr>
+            <a:r>
+              <a:rPr lang="zh-CN" altLang="en-US" sz="1200" dirty="0">
+                <a:solidFill>
+                  <a:srgbClr val="1F2937"/>
+                </a:solidFill>
+                <a:latin typeface="Microsoft YaHei" pitchFamily="34" charset="0"/>
+                <a:ea typeface="Microsoft YaHei" pitchFamily="34" charset="-122"/>
+                <a:cs typeface="Microsoft YaHei" pitchFamily="34" charset="-120"/>
+              </a:rPr>
+              <a:t>受数据库唯一性约束影响，</a:t>
+            </a:r>
+            <a:r>
+              <a:rPr lang="en-US" sz="1200" dirty="0" err="1">
+                <a:solidFill>
+                  <a:srgbClr val="1F2937"/>
+                </a:solidFill>
+                <a:latin typeface="Microsoft YaHei" pitchFamily="34" charset="0"/>
+                <a:ea typeface="Microsoft YaHei" pitchFamily="34" charset="-122"/>
+                <a:cs typeface="Microsoft YaHei" pitchFamily="34" charset="-120"/>
+              </a:rPr>
+              <a:t>回收站尚未完成，目前主要依赖软删除字段</a:t>
+            </a:r>
+            <a:endParaRPr lang="en-US" sz="1200" dirty="0"/>
+          </a:p>
+        </p:txBody>
+      </p:sp>
+      <p:sp>
+        <p:nvSpPr>
+          <p:cNvPr id="12" name="Shape 10"/>
+          <p:cNvSpPr/>
+          <p:nvPr/>
+        </p:nvSpPr>
+        <p:spPr>
+          <a:xfrm>
+            <a:off x="731520" y="3017520"/>
+            <a:ext cx="384048" cy="384048"/>
+          </a:xfrm>
+          <a:prstGeom prst="roundRect">
+            <a:avLst>
+              <a:gd name="adj" fmla="val 19048"/>
+            </a:avLst>
+          </a:prstGeom>
+          <a:solidFill>
+            <a:srgbClr val="C69266"/>
+          </a:solidFill>
+          <a:ln w="12700">
+            <a:solidFill>
+              <a:srgbClr val="C69266"/>
+            </a:solidFill>
+            <a:prstDash val="solid"/>
+          </a:ln>
+        </p:spPr>
+        <p:txBody>
+          <a:bodyPr/>
+          <a:lstStyle/>
+          <a:p>
+            <a:endParaRPr lang="zh-CN" altLang="en-US"/>
+          </a:p>
+        </p:txBody>
+      </p:sp>
+      <p:sp>
+        <p:nvSpPr>
+          <p:cNvPr id="13" name="Text 11"/>
+          <p:cNvSpPr/>
+          <p:nvPr/>
+        </p:nvSpPr>
+        <p:spPr>
+          <a:xfrm>
+            <a:off x="731520" y="3017520"/>
+            <a:ext cx="384048" cy="384048"/>
+          </a:xfrm>
+          <a:prstGeom prst="rect">
+            <a:avLst/>
+          </a:prstGeom>
+          <a:noFill/>
+          <a:ln/>
+        </p:spPr>
+        <p:txBody>
+          <a:bodyPr wrap="square" rtlCol="0" anchor="ctr"/>
+          <a:lstStyle/>
+          <a:p>
+            <a:pPr marL="0" indent="0" algn="ctr">
+              <a:buNone/>
+            </a:pPr>
+            <a:r>
+              <a:rPr lang="en-US" sz="1300" b="1" dirty="0">
+                <a:solidFill>
+                  <a:srgbClr val="FFFFFF"/>
+                </a:solidFill>
+                <a:latin typeface="Georgia" pitchFamily="34" charset="0"/>
+                <a:ea typeface="Georgia" pitchFamily="34" charset="-122"/>
+                <a:cs typeface="Georgia" pitchFamily="34" charset="-120"/>
+              </a:rPr>
+              <a:t>2</a:t>
+            </a:r>
+            <a:endParaRPr lang="en-US" sz="1300" dirty="0"/>
+          </a:p>
+        </p:txBody>
+      </p:sp>
+      <p:sp>
+        <p:nvSpPr>
+          <p:cNvPr id="14" name="Text 12"/>
+          <p:cNvSpPr/>
+          <p:nvPr/>
+        </p:nvSpPr>
+        <p:spPr>
+          <a:xfrm>
+            <a:off x="1234440" y="2971800"/>
+            <a:ext cx="4434840" cy="502920"/>
+          </a:xfrm>
+          <a:prstGeom prst="rect">
+            <a:avLst/>
+          </a:prstGeom>
+          <a:noFill/>
+          <a:ln/>
+        </p:spPr>
+        <p:txBody>
+          <a:bodyPr wrap="square" rtlCol="0" anchor="ctr"/>
+          <a:lstStyle/>
+          <a:p>
+            <a:pPr marL="0" indent="0">
+              <a:buNone/>
+            </a:pPr>
+            <a:r>
+              <a:rPr lang="en-US" sz="1200" dirty="0">
+                <a:solidFill>
+                  <a:srgbClr val="1F2937"/>
+                </a:solidFill>
+                <a:latin typeface="Microsoft YaHei" pitchFamily="34" charset="0"/>
+                <a:ea typeface="Microsoft YaHei" pitchFamily="34" charset="-122"/>
+                <a:cs typeface="Microsoft YaHei" pitchFamily="34" charset="-120"/>
+              </a:rPr>
+              <a:t>知识图谱以全局图为主，局部关系分析仍可细化</a:t>
+            </a:r>
+            <a:endParaRPr lang="en-US" sz="1200" dirty="0"/>
+          </a:p>
+        </p:txBody>
+      </p:sp>
+      <p:sp>
+        <p:nvSpPr>
+          <p:cNvPr id="15" name="Shape 13"/>
+          <p:cNvSpPr/>
+          <p:nvPr/>
+        </p:nvSpPr>
+        <p:spPr>
+          <a:xfrm>
+            <a:off x="731520" y="3840480"/>
+            <a:ext cx="384048" cy="384048"/>
+          </a:xfrm>
+          <a:prstGeom prst="roundRect">
+            <a:avLst>
+              <a:gd name="adj" fmla="val 19048"/>
+            </a:avLst>
+          </a:prstGeom>
+          <a:solidFill>
+            <a:srgbClr val="C69266"/>
+          </a:solidFill>
+          <a:ln w="12700">
+            <a:solidFill>
+              <a:srgbClr val="C69266"/>
+            </a:solidFill>
+            <a:prstDash val="solid"/>
+          </a:ln>
+        </p:spPr>
+        <p:txBody>
+          <a:bodyPr/>
+          <a:lstStyle/>
+          <a:p>
+            <a:endParaRPr lang="zh-CN" altLang="en-US"/>
+          </a:p>
+        </p:txBody>
+      </p:sp>
+      <p:sp>
+        <p:nvSpPr>
+          <p:cNvPr id="16" name="Text 14"/>
+          <p:cNvSpPr/>
+          <p:nvPr/>
+        </p:nvSpPr>
+        <p:spPr>
+          <a:xfrm>
+            <a:off x="731520" y="3840480"/>
+            <a:ext cx="384048" cy="384048"/>
+          </a:xfrm>
+          <a:prstGeom prst="rect">
+            <a:avLst/>
+          </a:prstGeom>
+          <a:noFill/>
+          <a:ln/>
+        </p:spPr>
+        <p:txBody>
+          <a:bodyPr wrap="square" rtlCol="0" anchor="ctr"/>
+          <a:lstStyle/>
+          <a:p>
+            <a:pPr marL="0" indent="0" algn="ctr">
+              <a:buNone/>
+            </a:pPr>
+            <a:r>
+              <a:rPr lang="en-US" sz="1300" b="1" dirty="0">
+                <a:solidFill>
+                  <a:srgbClr val="FFFFFF"/>
+                </a:solidFill>
+                <a:latin typeface="Georgia" pitchFamily="34" charset="0"/>
+                <a:ea typeface="Georgia" pitchFamily="34" charset="-122"/>
+                <a:cs typeface="Georgia" pitchFamily="34" charset="-120"/>
+              </a:rPr>
+              <a:t>3</a:t>
+            </a:r>
+            <a:endParaRPr lang="en-US" sz="1300" dirty="0"/>
+          </a:p>
+        </p:txBody>
+      </p:sp>
+      <p:sp>
+        <p:nvSpPr>
+          <p:cNvPr id="17" name="Text 15"/>
+          <p:cNvSpPr/>
+          <p:nvPr/>
+        </p:nvSpPr>
+        <p:spPr>
+          <a:xfrm>
+            <a:off x="1234440" y="3794760"/>
+            <a:ext cx="4434840" cy="502920"/>
+          </a:xfrm>
+          <a:prstGeom prst="rect">
+            <a:avLst/>
+          </a:prstGeom>
+          <a:noFill/>
+          <a:ln/>
+        </p:spPr>
+        <p:txBody>
+          <a:bodyPr wrap="square" rtlCol="0" anchor="ctr"/>
+          <a:lstStyle/>
+          <a:p>
+            <a:pPr marL="0" indent="0">
+              <a:buNone/>
+            </a:pPr>
+            <a:r>
+              <a:rPr lang="en-US" sz="1200" dirty="0" err="1">
+                <a:solidFill>
+                  <a:srgbClr val="1F2937"/>
+                </a:solidFill>
+                <a:latin typeface="Microsoft YaHei" pitchFamily="34" charset="0"/>
+                <a:ea typeface="Microsoft YaHei" pitchFamily="34" charset="-122"/>
+                <a:cs typeface="Microsoft YaHei" pitchFamily="34" charset="-120"/>
+              </a:rPr>
+              <a:t>性能优化仍有提升空间，图谱与检索响应有待提升</a:t>
+            </a:r>
+            <a:endParaRPr lang="en-US" sz="1200" dirty="0"/>
+          </a:p>
+        </p:txBody>
+      </p:sp>
+      <p:sp>
+        <p:nvSpPr>
+          <p:cNvPr id="18" name="Shape 16"/>
+          <p:cNvSpPr/>
+          <p:nvPr/>
+        </p:nvSpPr>
+        <p:spPr>
+          <a:xfrm>
+            <a:off x="731520" y="4663440"/>
+            <a:ext cx="384048" cy="384048"/>
+          </a:xfrm>
+          <a:prstGeom prst="roundRect">
+            <a:avLst>
+              <a:gd name="adj" fmla="val 19048"/>
+            </a:avLst>
+          </a:prstGeom>
+          <a:solidFill>
+            <a:srgbClr val="C69266"/>
+          </a:solidFill>
+          <a:ln w="12700">
+            <a:solidFill>
+              <a:srgbClr val="C69266"/>
+            </a:solidFill>
+            <a:prstDash val="solid"/>
+          </a:ln>
+        </p:spPr>
+        <p:txBody>
+          <a:bodyPr/>
+          <a:lstStyle/>
+          <a:p>
+            <a:endParaRPr lang="zh-CN" altLang="en-US"/>
+          </a:p>
+        </p:txBody>
+      </p:sp>
+      <p:sp>
+        <p:nvSpPr>
+          <p:cNvPr id="19" name="Text 17"/>
+          <p:cNvSpPr/>
+          <p:nvPr/>
+        </p:nvSpPr>
+        <p:spPr>
+          <a:xfrm>
+            <a:off x="731520" y="4663440"/>
+            <a:ext cx="384048" cy="384048"/>
+          </a:xfrm>
+          <a:prstGeom prst="rect">
+            <a:avLst/>
+          </a:prstGeom>
+          <a:noFill/>
+          <a:ln/>
+        </p:spPr>
+        <p:txBody>
+          <a:bodyPr wrap="square" rtlCol="0" anchor="ctr"/>
+          <a:lstStyle/>
+          <a:p>
+            <a:pPr marL="0" indent="0" algn="ctr">
+              <a:buNone/>
+            </a:pPr>
+            <a:r>
+              <a:rPr lang="en-US" sz="1300" b="1" dirty="0">
+                <a:solidFill>
+                  <a:srgbClr val="FFFFFF"/>
+                </a:solidFill>
+                <a:latin typeface="Georgia" pitchFamily="34" charset="0"/>
+                <a:ea typeface="Georgia" pitchFamily="34" charset="-122"/>
+                <a:cs typeface="Georgia" pitchFamily="34" charset="-120"/>
+              </a:rPr>
+              <a:t>4</a:t>
+            </a:r>
+            <a:endParaRPr lang="en-US" sz="1300" dirty="0"/>
+          </a:p>
+        </p:txBody>
+      </p:sp>
+      <p:sp>
+        <p:nvSpPr>
+          <p:cNvPr id="20" name="Text 18"/>
+          <p:cNvSpPr/>
+          <p:nvPr/>
+        </p:nvSpPr>
+        <p:spPr>
+          <a:xfrm>
+            <a:off x="1234440" y="4617720"/>
+            <a:ext cx="4434840" cy="502920"/>
+          </a:xfrm>
+          <a:prstGeom prst="rect">
+            <a:avLst/>
+          </a:prstGeom>
+          <a:noFill/>
+          <a:ln/>
+        </p:spPr>
+        <p:txBody>
+          <a:bodyPr wrap="square" rtlCol="0" anchor="ctr"/>
+          <a:lstStyle/>
+          <a:p>
+            <a:pPr marL="0" indent="0">
+              <a:buNone/>
+            </a:pPr>
+            <a:r>
+              <a:rPr lang="en-US" sz="1200" dirty="0" err="1">
+                <a:solidFill>
+                  <a:srgbClr val="1F2937"/>
+                </a:solidFill>
+                <a:latin typeface="Microsoft YaHei" pitchFamily="34" charset="0"/>
+                <a:ea typeface="Microsoft YaHei" pitchFamily="34" charset="-122"/>
+                <a:cs typeface="Microsoft YaHei" pitchFamily="34" charset="-120"/>
+              </a:rPr>
+              <a:t>缺少</a:t>
+            </a:r>
+            <a:r>
+              <a:rPr lang="zh-CN" altLang="en-US" sz="1200" dirty="0">
+                <a:solidFill>
+                  <a:srgbClr val="1F2937"/>
+                </a:solidFill>
+                <a:latin typeface="Microsoft YaHei" pitchFamily="34" charset="0"/>
+                <a:ea typeface="Microsoft YaHei" pitchFamily="34" charset="-122"/>
+                <a:cs typeface="Microsoft YaHei" pitchFamily="34" charset="-120"/>
+              </a:rPr>
+              <a:t>双链</a:t>
+            </a:r>
+            <a:r>
+              <a:rPr lang="en-US" sz="1200" dirty="0" err="1">
+                <a:solidFill>
+                  <a:srgbClr val="1F2937"/>
+                </a:solidFill>
+                <a:latin typeface="Microsoft YaHei" pitchFamily="34" charset="0"/>
+                <a:ea typeface="Microsoft YaHei" pitchFamily="34" charset="-122"/>
+                <a:cs typeface="Microsoft YaHei" pitchFamily="34" charset="-120"/>
+              </a:rPr>
+              <a:t>块级索引，段落级引用与定位精度不如</a:t>
+            </a:r>
+            <a:r>
+              <a:rPr lang="en-US" sz="1200" dirty="0">
+                <a:solidFill>
+                  <a:srgbClr val="1F2937"/>
+                </a:solidFill>
+                <a:latin typeface="Microsoft YaHei" pitchFamily="34" charset="0"/>
+                <a:ea typeface="Microsoft YaHei" pitchFamily="34" charset="-122"/>
+                <a:cs typeface="Microsoft YaHei" pitchFamily="34" charset="-120"/>
+              </a:rPr>
+              <a:t> Obsidian</a:t>
+            </a:r>
+            <a:endParaRPr lang="en-US" sz="1200" dirty="0"/>
+          </a:p>
+        </p:txBody>
+      </p:sp>
+      <p:sp>
+        <p:nvSpPr>
+          <p:cNvPr id="21" name="Shape 19"/>
+          <p:cNvSpPr/>
+          <p:nvPr/>
+        </p:nvSpPr>
+        <p:spPr>
+          <a:xfrm>
+            <a:off x="6217920" y="1371600"/>
+            <a:ext cx="5486400" cy="4206240"/>
+          </a:xfrm>
+          <a:prstGeom prst="roundRect">
+            <a:avLst>
+              <a:gd name="adj" fmla="val 1739"/>
+            </a:avLst>
+          </a:prstGeom>
+          <a:solidFill>
+            <a:srgbClr val="FFFFFF"/>
+          </a:solidFill>
+          <a:ln w="9525">
+            <a:solidFill>
+              <a:srgbClr val="D9CDBF"/>
+            </a:solidFill>
+            <a:prstDash val="solid"/>
+          </a:ln>
+        </p:spPr>
+        <p:txBody>
+          <a:bodyPr/>
+          <a:lstStyle/>
+          <a:p>
+            <a:endParaRPr lang="zh-CN" altLang="en-US"/>
+          </a:p>
+        </p:txBody>
+      </p:sp>
+      <p:sp>
+        <p:nvSpPr>
+          <p:cNvPr id="22" name="Shape 20"/>
+          <p:cNvSpPr/>
+          <p:nvPr/>
+        </p:nvSpPr>
+        <p:spPr>
+          <a:xfrm>
+            <a:off x="6217920" y="1371600"/>
+            <a:ext cx="5486400" cy="91440"/>
+          </a:xfrm>
+          <a:prstGeom prst="rect">
+            <a:avLst/>
+          </a:prstGeom>
+          <a:solidFill>
+            <a:srgbClr val="1A2B5C"/>
+          </a:solidFill>
+          <a:ln w="12700">
+            <a:solidFill>
+              <a:srgbClr val="1A2B5C"/>
+            </a:solidFill>
+            <a:prstDash val="solid"/>
+          </a:ln>
+        </p:spPr>
+        <p:txBody>
+          <a:bodyPr/>
+          <a:lstStyle/>
+          <a:p>
+            <a:endParaRPr lang="zh-CN" altLang="en-US"/>
+          </a:p>
+        </p:txBody>
+      </p:sp>
+      <p:sp>
+        <p:nvSpPr>
+          <p:cNvPr id="23" name="Text 21"/>
+          <p:cNvSpPr/>
+          <p:nvPr/>
+        </p:nvSpPr>
+        <p:spPr>
+          <a:xfrm>
+            <a:off x="6492240" y="1600200"/>
+            <a:ext cx="4937760" cy="457200"/>
+          </a:xfrm>
+          <a:prstGeom prst="rect">
+            <a:avLst/>
+          </a:prstGeom>
+          <a:noFill/>
+          <a:ln/>
+        </p:spPr>
+        <p:txBody>
+          <a:bodyPr wrap="square" rtlCol="0" anchor="ctr"/>
+          <a:lstStyle/>
+          <a:p>
+            <a:pPr marL="0" indent="0">
+              <a:buNone/>
+            </a:pPr>
+            <a:r>
+              <a:rPr lang="en-US" sz="1800" b="1" dirty="0">
+                <a:solidFill>
+                  <a:srgbClr val="1A2B5C"/>
+                </a:solidFill>
+                <a:latin typeface="Microsoft YaHei" pitchFamily="34" charset="0"/>
+                <a:ea typeface="Microsoft YaHei" pitchFamily="34" charset="-122"/>
+                <a:cs typeface="Microsoft YaHei" pitchFamily="34" charset="-120"/>
+              </a:rPr>
+              <a:t>后续优化</a:t>
+            </a:r>
+            <a:endParaRPr lang="en-US" sz="1800" dirty="0"/>
+          </a:p>
+        </p:txBody>
+      </p:sp>
+      <p:sp>
+        <p:nvSpPr>
+          <p:cNvPr id="24" name="Shape 22"/>
+          <p:cNvSpPr/>
+          <p:nvPr/>
+        </p:nvSpPr>
+        <p:spPr>
+          <a:xfrm>
+            <a:off x="6492240" y="2194560"/>
+            <a:ext cx="384048" cy="384048"/>
+          </a:xfrm>
+          <a:prstGeom prst="roundRect">
+            <a:avLst>
+              <a:gd name="adj" fmla="val 19048"/>
+            </a:avLst>
+          </a:prstGeom>
+          <a:solidFill>
+            <a:srgbClr val="1A2B5C"/>
+          </a:solidFill>
+          <a:ln w="12700">
+            <a:solidFill>
+              <a:srgbClr val="1A2B5C"/>
+            </a:solidFill>
+            <a:prstDash val="solid"/>
+          </a:ln>
+        </p:spPr>
+        <p:txBody>
+          <a:bodyPr/>
+          <a:lstStyle/>
+          <a:p>
+            <a:endParaRPr lang="zh-CN" altLang="en-US"/>
+          </a:p>
+        </p:txBody>
+      </p:sp>
+      <p:sp>
+        <p:nvSpPr>
+          <p:cNvPr id="25" name="Text 23"/>
+          <p:cNvSpPr/>
+          <p:nvPr/>
+        </p:nvSpPr>
+        <p:spPr>
+          <a:xfrm>
+            <a:off x="6492240" y="2194560"/>
+            <a:ext cx="384048" cy="384048"/>
+          </a:xfrm>
+          <a:prstGeom prst="rect">
+            <a:avLst/>
+          </a:prstGeom>
+          <a:noFill/>
+          <a:ln/>
+        </p:spPr>
+        <p:txBody>
+          <a:bodyPr wrap="square" rtlCol="0" anchor="ctr"/>
+          <a:lstStyle/>
+          <a:p>
+            <a:pPr marL="0" indent="0" algn="ctr">
+              <a:buNone/>
+            </a:pPr>
+            <a:r>
+              <a:rPr lang="en-US" sz="1300" b="1" dirty="0">
+                <a:solidFill>
+                  <a:srgbClr val="FFFFFF"/>
+                </a:solidFill>
+                <a:latin typeface="Georgia" pitchFamily="34" charset="0"/>
+                <a:ea typeface="Georgia" pitchFamily="34" charset="-122"/>
+                <a:cs typeface="Georgia" pitchFamily="34" charset="-120"/>
+              </a:rPr>
+              <a:t>1</a:t>
+            </a:r>
+            <a:endParaRPr lang="en-US" sz="1300" dirty="0"/>
+          </a:p>
+        </p:txBody>
+      </p:sp>
+      <p:sp>
+        <p:nvSpPr>
+          <p:cNvPr id="26" name="Text 24"/>
+          <p:cNvSpPr/>
+          <p:nvPr/>
+        </p:nvSpPr>
+        <p:spPr>
+          <a:xfrm>
+            <a:off x="6995160" y="2148840"/>
+            <a:ext cx="4434840" cy="502920"/>
+          </a:xfrm>
+          <a:prstGeom prst="rect">
+            <a:avLst/>
+          </a:prstGeom>
+          <a:noFill/>
+          <a:ln/>
+        </p:spPr>
+        <p:txBody>
+          <a:bodyPr wrap="square" rtlCol="0" anchor="ctr"/>
+          <a:lstStyle/>
+          <a:p>
+            <a:pPr marL="0" indent="0">
+              <a:buNone/>
+            </a:pPr>
+            <a:r>
+              <a:rPr lang="en-US" sz="1200" dirty="0">
+                <a:solidFill>
+                  <a:srgbClr val="1F2937"/>
+                </a:solidFill>
+                <a:latin typeface="Microsoft YaHei" pitchFamily="34" charset="0"/>
+                <a:ea typeface="Microsoft YaHei" pitchFamily="34" charset="-122"/>
+                <a:cs typeface="Microsoft YaHei" pitchFamily="34" charset="-120"/>
+              </a:rPr>
+              <a:t>完成回收站、恢复与彻底删除闭环</a:t>
+            </a:r>
+            <a:endParaRPr lang="en-US" sz="1200" dirty="0"/>
+          </a:p>
+        </p:txBody>
+      </p:sp>
+      <p:sp>
+        <p:nvSpPr>
+          <p:cNvPr id="27" name="Shape 25"/>
+          <p:cNvSpPr/>
+          <p:nvPr/>
+        </p:nvSpPr>
+        <p:spPr>
+          <a:xfrm>
+            <a:off x="6492240" y="3017520"/>
+            <a:ext cx="384048" cy="384048"/>
+          </a:xfrm>
+          <a:prstGeom prst="roundRect">
+            <a:avLst>
+              <a:gd name="adj" fmla="val 19048"/>
+            </a:avLst>
+          </a:prstGeom>
+          <a:solidFill>
+            <a:srgbClr val="1A2B5C"/>
+          </a:solidFill>
+          <a:ln w="12700">
+            <a:solidFill>
+              <a:srgbClr val="1A2B5C"/>
+            </a:solidFill>
+            <a:prstDash val="solid"/>
+          </a:ln>
+        </p:spPr>
+        <p:txBody>
+          <a:bodyPr/>
+          <a:lstStyle/>
+          <a:p>
+            <a:endParaRPr lang="zh-CN" altLang="en-US"/>
+          </a:p>
+        </p:txBody>
+      </p:sp>
+      <p:sp>
+        <p:nvSpPr>
+          <p:cNvPr id="28" name="Text 26"/>
+          <p:cNvSpPr/>
+          <p:nvPr/>
+        </p:nvSpPr>
+        <p:spPr>
+          <a:xfrm>
+            <a:off x="6492240" y="3017520"/>
+            <a:ext cx="384048" cy="384048"/>
+          </a:xfrm>
+          <a:prstGeom prst="rect">
+            <a:avLst/>
+          </a:prstGeom>
+          <a:noFill/>
+          <a:ln/>
+        </p:spPr>
+        <p:txBody>
+          <a:bodyPr wrap="square" rtlCol="0" anchor="ctr"/>
+          <a:lstStyle/>
+          <a:p>
+            <a:pPr marL="0" indent="0" algn="ctr">
+              <a:buNone/>
+            </a:pPr>
+            <a:r>
+              <a:rPr lang="en-US" sz="1300" b="1" dirty="0">
+                <a:solidFill>
+                  <a:srgbClr val="FFFFFF"/>
+                </a:solidFill>
+                <a:latin typeface="Georgia" pitchFamily="34" charset="0"/>
+                <a:ea typeface="Georgia" pitchFamily="34" charset="-122"/>
+                <a:cs typeface="Georgia" pitchFamily="34" charset="-120"/>
+              </a:rPr>
+              <a:t>2</a:t>
+            </a:r>
+            <a:endParaRPr lang="en-US" sz="1300" dirty="0"/>
+          </a:p>
+        </p:txBody>
+      </p:sp>
+      <p:sp>
+        <p:nvSpPr>
+          <p:cNvPr id="29" name="Text 27"/>
+          <p:cNvSpPr/>
+          <p:nvPr/>
+        </p:nvSpPr>
+        <p:spPr>
+          <a:xfrm>
+            <a:off x="6995160" y="2971800"/>
+            <a:ext cx="4434840" cy="502920"/>
+          </a:xfrm>
+          <a:prstGeom prst="rect">
+            <a:avLst/>
+          </a:prstGeom>
+          <a:noFill/>
+          <a:ln/>
+        </p:spPr>
+        <p:txBody>
+          <a:bodyPr wrap="square" rtlCol="0" anchor="ctr"/>
+          <a:lstStyle/>
+          <a:p>
+            <a:pPr marL="0" indent="0">
+              <a:buNone/>
+            </a:pPr>
+            <a:r>
+              <a:rPr lang="en-US" sz="1200" dirty="0">
+                <a:solidFill>
+                  <a:srgbClr val="1F2937"/>
+                </a:solidFill>
+                <a:latin typeface="Microsoft YaHei" pitchFamily="34" charset="0"/>
+                <a:ea typeface="Microsoft YaHei" pitchFamily="34" charset="-122"/>
+                <a:cs typeface="Microsoft YaHei" pitchFamily="34" charset="-120"/>
+              </a:rPr>
+              <a:t>增加局部关系图、知识路径探索与版本差异对比</a:t>
+            </a:r>
+            <a:endParaRPr lang="en-US" sz="1200" dirty="0"/>
+          </a:p>
+        </p:txBody>
+      </p:sp>
+      <p:sp>
+        <p:nvSpPr>
+          <p:cNvPr id="30" name="Shape 28"/>
+          <p:cNvSpPr/>
+          <p:nvPr/>
+        </p:nvSpPr>
+        <p:spPr>
+          <a:xfrm>
+            <a:off x="6492240" y="3840480"/>
+            <a:ext cx="384048" cy="384048"/>
+          </a:xfrm>
+          <a:prstGeom prst="roundRect">
+            <a:avLst>
+              <a:gd name="adj" fmla="val 19048"/>
+            </a:avLst>
+          </a:prstGeom>
+          <a:solidFill>
+            <a:srgbClr val="1A2B5C"/>
+          </a:solidFill>
+          <a:ln w="12700">
+            <a:solidFill>
+              <a:srgbClr val="1A2B5C"/>
+            </a:solidFill>
+            <a:prstDash val="solid"/>
+          </a:ln>
+        </p:spPr>
+        <p:txBody>
+          <a:bodyPr/>
+          <a:lstStyle/>
+          <a:p>
+            <a:endParaRPr lang="zh-CN" altLang="en-US"/>
+          </a:p>
+        </p:txBody>
+      </p:sp>
+      <p:sp>
+        <p:nvSpPr>
+          <p:cNvPr id="31" name="Text 29"/>
+          <p:cNvSpPr/>
+          <p:nvPr/>
+        </p:nvSpPr>
+        <p:spPr>
+          <a:xfrm>
+            <a:off x="6492240" y="3840480"/>
+            <a:ext cx="384048" cy="384048"/>
+          </a:xfrm>
+          <a:prstGeom prst="rect">
+            <a:avLst/>
+          </a:prstGeom>
+          <a:noFill/>
+          <a:ln/>
+        </p:spPr>
+        <p:txBody>
+          <a:bodyPr wrap="square" rtlCol="0" anchor="ctr"/>
+          <a:lstStyle/>
+          <a:p>
+            <a:pPr marL="0" indent="0" algn="ctr">
+              <a:buNone/>
+            </a:pPr>
+            <a:r>
+              <a:rPr lang="en-US" sz="1300" b="1" dirty="0">
+                <a:solidFill>
+                  <a:srgbClr val="FFFFFF"/>
+                </a:solidFill>
+                <a:latin typeface="Georgia" pitchFamily="34" charset="0"/>
+                <a:ea typeface="Georgia" pitchFamily="34" charset="-122"/>
+                <a:cs typeface="Georgia" pitchFamily="34" charset="-120"/>
+              </a:rPr>
+              <a:t>3</a:t>
+            </a:r>
+            <a:endParaRPr lang="en-US" sz="1300" dirty="0"/>
+          </a:p>
+        </p:txBody>
+      </p:sp>
+      <p:sp>
+        <p:nvSpPr>
+          <p:cNvPr id="32" name="Text 30"/>
+          <p:cNvSpPr/>
+          <p:nvPr/>
+        </p:nvSpPr>
+        <p:spPr>
+          <a:xfrm>
+            <a:off x="6995160" y="3794760"/>
+            <a:ext cx="4434840" cy="502920"/>
+          </a:xfrm>
+          <a:prstGeom prst="rect">
+            <a:avLst/>
+          </a:prstGeom>
+          <a:noFill/>
+          <a:ln/>
+        </p:spPr>
+        <p:txBody>
+          <a:bodyPr wrap="square" rtlCol="0" anchor="ctr"/>
+          <a:lstStyle/>
+          <a:p>
+            <a:pPr marL="0" indent="0">
+              <a:buNone/>
+            </a:pPr>
+            <a:r>
+              <a:rPr lang="en-US" sz="1200">
+                <a:solidFill>
+                  <a:srgbClr val="1F2937"/>
+                </a:solidFill>
+                <a:latin typeface="Microsoft YaHei" pitchFamily="34" charset="0"/>
+                <a:ea typeface="Microsoft YaHei" pitchFamily="34" charset="-122"/>
+                <a:cs typeface="Microsoft YaHei" pitchFamily="34" charset="-120"/>
+              </a:rPr>
+              <a:t>引入缓存与索引调优，提升图谱渲染与检索响应</a:t>
+            </a:r>
+            <a:endParaRPr lang="en-US" sz="1200" dirty="0"/>
+          </a:p>
+        </p:txBody>
+      </p:sp>
+      <p:sp>
+        <p:nvSpPr>
+          <p:cNvPr id="33" name="Shape 31"/>
+          <p:cNvSpPr/>
+          <p:nvPr/>
+        </p:nvSpPr>
+        <p:spPr>
+          <a:xfrm>
+            <a:off x="6492240" y="4663440"/>
+            <a:ext cx="384048" cy="384048"/>
+          </a:xfrm>
+          <a:prstGeom prst="roundRect">
+            <a:avLst>
+              <a:gd name="adj" fmla="val 19048"/>
+            </a:avLst>
+          </a:prstGeom>
+          <a:solidFill>
+            <a:srgbClr val="1A2B5C"/>
+          </a:solidFill>
+          <a:ln w="12700">
+            <a:solidFill>
+              <a:srgbClr val="1A2B5C"/>
+            </a:solidFill>
+            <a:prstDash val="solid"/>
+          </a:ln>
+        </p:spPr>
+        <p:txBody>
+          <a:bodyPr/>
+          <a:lstStyle/>
+          <a:p>
+            <a:endParaRPr lang="zh-CN" altLang="en-US"/>
+          </a:p>
+        </p:txBody>
+      </p:sp>
+      <p:sp>
+        <p:nvSpPr>
+          <p:cNvPr id="34" name="Text 32"/>
+          <p:cNvSpPr/>
+          <p:nvPr/>
+        </p:nvSpPr>
+        <p:spPr>
+          <a:xfrm>
+            <a:off x="6492240" y="4663440"/>
+            <a:ext cx="384048" cy="384048"/>
+          </a:xfrm>
+          <a:prstGeom prst="rect">
+            <a:avLst/>
+          </a:prstGeom>
+          <a:noFill/>
+          <a:ln/>
+        </p:spPr>
+        <p:txBody>
+          <a:bodyPr wrap="square" rtlCol="0" anchor="ctr"/>
+          <a:lstStyle/>
+          <a:p>
+            <a:pPr marL="0" indent="0" algn="ctr">
+              <a:buNone/>
+            </a:pPr>
+            <a:r>
+              <a:rPr lang="en-US" sz="1300" b="1" dirty="0">
+                <a:solidFill>
+                  <a:srgbClr val="FFFFFF"/>
+                </a:solidFill>
+                <a:latin typeface="Georgia" pitchFamily="34" charset="0"/>
+                <a:ea typeface="Georgia" pitchFamily="34" charset="-122"/>
+                <a:cs typeface="Georgia" pitchFamily="34" charset="-120"/>
+              </a:rPr>
+              <a:t>4</a:t>
+            </a:r>
+            <a:endParaRPr lang="en-US" sz="1300" dirty="0"/>
+          </a:p>
+        </p:txBody>
+      </p:sp>
+      <p:sp>
+        <p:nvSpPr>
+          <p:cNvPr id="35" name="Text 33"/>
+          <p:cNvSpPr/>
+          <p:nvPr/>
+        </p:nvSpPr>
+        <p:spPr>
+          <a:xfrm>
+            <a:off x="6995160" y="4617720"/>
+            <a:ext cx="4434840" cy="502920"/>
+          </a:xfrm>
+          <a:prstGeom prst="rect">
+            <a:avLst/>
+          </a:prstGeom>
+          <a:noFill/>
+          <a:ln/>
+        </p:spPr>
+        <p:txBody>
+          <a:bodyPr wrap="square" rtlCol="0" anchor="ctr"/>
+          <a:lstStyle/>
+          <a:p>
+            <a:pPr marL="0" indent="0">
+              <a:buNone/>
+            </a:pPr>
+            <a:r>
+              <a:rPr lang="en-US" sz="1200" dirty="0" err="1">
+                <a:solidFill>
+                  <a:srgbClr val="1F2937"/>
+                </a:solidFill>
+                <a:latin typeface="Microsoft YaHei" pitchFamily="34" charset="0"/>
+                <a:ea typeface="Microsoft YaHei" pitchFamily="34" charset="-122"/>
+                <a:cs typeface="Microsoft YaHei" pitchFamily="34" charset="-120"/>
+              </a:rPr>
+              <a:t>引入块级</a:t>
+            </a:r>
+            <a:r>
+              <a:rPr lang="en-US" sz="1200" dirty="0">
+                <a:solidFill>
+                  <a:srgbClr val="1F2937"/>
+                </a:solidFill>
+                <a:latin typeface="Microsoft YaHei" pitchFamily="34" charset="0"/>
+                <a:ea typeface="Microsoft YaHei" pitchFamily="34" charset="-122"/>
+                <a:cs typeface="Microsoft YaHei" pitchFamily="34" charset="-120"/>
+              </a:rPr>
+              <a:t> ID 与 [[</a:t>
+            </a:r>
+            <a:r>
+              <a:rPr lang="en-US" sz="1200" dirty="0" err="1">
+                <a:solidFill>
+                  <a:srgbClr val="1F2937"/>
+                </a:solidFill>
+                <a:latin typeface="Microsoft YaHei" pitchFamily="34" charset="0"/>
+                <a:ea typeface="Microsoft YaHei" pitchFamily="34" charset="-122"/>
+                <a:cs typeface="Microsoft YaHei" pitchFamily="34" charset="-120"/>
+              </a:rPr>
+              <a:t>笔记块ID</a:t>
+            </a:r>
+            <a:r>
+              <a:rPr lang="en-US" sz="1200" dirty="0">
+                <a:solidFill>
+                  <a:srgbClr val="1F2937"/>
+                </a:solidFill>
+                <a:latin typeface="Microsoft YaHei" pitchFamily="34" charset="0"/>
+                <a:ea typeface="Microsoft YaHei" pitchFamily="34" charset="-122"/>
+                <a:cs typeface="Microsoft YaHei" pitchFamily="34" charset="-120"/>
+              </a:rPr>
+              <a:t>]] </a:t>
+            </a:r>
+            <a:r>
+              <a:rPr lang="en-US" sz="1200" dirty="0" err="1">
+                <a:solidFill>
+                  <a:srgbClr val="1F2937"/>
+                </a:solidFill>
+                <a:latin typeface="Microsoft YaHei" pitchFamily="34" charset="0"/>
+                <a:ea typeface="Microsoft YaHei" pitchFamily="34" charset="-122"/>
+                <a:cs typeface="Microsoft YaHei" pitchFamily="34" charset="-120"/>
+              </a:rPr>
+              <a:t>语法，支持段落级精确引用</a:t>
+            </a:r>
+            <a:endParaRPr lang="en-US" sz="1200" dirty="0"/>
+          </a:p>
+        </p:txBody>
+      </p:sp>
+      <p:sp>
+        <p:nvSpPr>
+          <p:cNvPr id="36" name="Shape 34"/>
+          <p:cNvSpPr/>
+          <p:nvPr/>
+        </p:nvSpPr>
+        <p:spPr>
+          <a:xfrm>
+            <a:off x="457200" y="5760720"/>
+            <a:ext cx="11277295" cy="640080"/>
+          </a:xfrm>
+          <a:prstGeom prst="roundRect">
+            <a:avLst>
+              <a:gd name="adj" fmla="val 8571"/>
+            </a:avLst>
+          </a:prstGeom>
+          <a:solidFill>
+            <a:srgbClr val="1A2B5C"/>
+          </a:solidFill>
+          <a:ln w="12700">
+            <a:solidFill>
+              <a:srgbClr val="1A2B5C"/>
+            </a:solidFill>
+            <a:prstDash val="solid"/>
+          </a:ln>
+        </p:spPr>
+        <p:txBody>
+          <a:bodyPr/>
+          <a:lstStyle/>
+          <a:p>
+            <a:endParaRPr lang="zh-CN" altLang="en-US"/>
+          </a:p>
+        </p:txBody>
+      </p:sp>
+      <p:sp>
+        <p:nvSpPr>
+          <p:cNvPr id="37" name="Text 35"/>
+          <p:cNvSpPr/>
+          <p:nvPr/>
+        </p:nvSpPr>
+        <p:spPr>
+          <a:xfrm>
+            <a:off x="457200" y="5760720"/>
+            <a:ext cx="11277295" cy="640080"/>
+          </a:xfrm>
+          <a:prstGeom prst="rect">
+            <a:avLst/>
+          </a:prstGeom>
+          <a:noFill/>
+          <a:ln/>
+        </p:spPr>
+        <p:txBody>
+          <a:bodyPr wrap="square" rtlCol="0" anchor="ctr"/>
+          <a:lstStyle/>
+          <a:p>
+            <a:pPr marL="0" indent="0" algn="ctr">
+              <a:buNone/>
+            </a:pPr>
+            <a:r>
+              <a:rPr lang="en-US" sz="1300" dirty="0">
+                <a:solidFill>
+                  <a:srgbClr val="FFFFFF"/>
+                </a:solidFill>
+                <a:latin typeface="Microsoft YaHei" pitchFamily="34" charset="0"/>
+                <a:ea typeface="Microsoft YaHei" pitchFamily="34" charset="-122"/>
+                <a:cs typeface="Microsoft YaHei" pitchFamily="34" charset="-120"/>
+              </a:rPr>
+              <a:t>当前版本已具备核心业务能力，后续工作重点放在工程完善和知识分析能力增强上。</a:t>
+            </a:r>
+            <a:endParaRPr lang="en-US" sz="1300" dirty="0"/>
+          </a:p>
+        </p:txBody>
+      </p:sp>
+      <p:sp>
+        <p:nvSpPr>
+          <p:cNvPr id="38" name="Shape 36"/>
+          <p:cNvSpPr/>
+          <p:nvPr/>
+        </p:nvSpPr>
+        <p:spPr>
+          <a:xfrm>
+            <a:off x="0" y="6629400"/>
+            <a:ext cx="12191695" cy="228600"/>
+          </a:xfrm>
+          <a:prstGeom prst="rect">
+            <a:avLst/>
+          </a:prstGeom>
+          <a:solidFill>
+            <a:srgbClr val="1A2B5C"/>
+          </a:solidFill>
+          <a:ln/>
+        </p:spPr>
+        <p:txBody>
+          <a:bodyPr/>
+          <a:lstStyle/>
+          <a:p>
+            <a:endParaRPr lang="zh-CN" altLang="en-US"/>
+          </a:p>
+        </p:txBody>
+      </p:sp>
+      <p:sp>
+        <p:nvSpPr>
+          <p:cNvPr id="39" name="Text 37"/>
+          <p:cNvSpPr/>
+          <p:nvPr/>
+        </p:nvSpPr>
+        <p:spPr>
+          <a:xfrm>
+            <a:off x="457200" y="6638544"/>
+            <a:ext cx="7315200" cy="219456"/>
+          </a:xfrm>
+          <a:prstGeom prst="rect">
+            <a:avLst/>
+          </a:prstGeom>
+          <a:noFill/>
+          <a:ln/>
+        </p:spPr>
+        <p:txBody>
+          <a:bodyPr wrap="square" rtlCol="0" anchor="ctr"/>
+          <a:lstStyle/>
+          <a:p>
+            <a:pPr marL="0" indent="0">
+              <a:buNone/>
+            </a:pPr>
+            <a:r>
+              <a:rPr lang="en-US" sz="900" dirty="0">
+                <a:solidFill>
+                  <a:srgbClr val="CFD7E8"/>
+                </a:solidFill>
+                <a:latin typeface="Microsoft YaHei" pitchFamily="34" charset="0"/>
+                <a:ea typeface="Microsoft YaHei" pitchFamily="34" charset="-122"/>
+                <a:cs typeface="Microsoft YaHei" pitchFamily="34" charset="-120"/>
+              </a:rPr>
+              <a:t>基于 Spring Boot + Vue 的个人双链笔记系统</a:t>
+            </a:r>
+            <a:endParaRPr lang="en-US" sz="900" dirty="0"/>
+          </a:p>
+        </p:txBody>
+      </p:sp>
+      <p:sp>
+        <p:nvSpPr>
+          <p:cNvPr id="40" name="Text 38"/>
+          <p:cNvSpPr/>
+          <p:nvPr/>
+        </p:nvSpPr>
+        <p:spPr>
+          <a:xfrm>
+            <a:off x="10972800" y="6638544"/>
+            <a:ext cx="731520" cy="219456"/>
+          </a:xfrm>
+          <a:prstGeom prst="rect">
+            <a:avLst/>
+          </a:prstGeom>
+          <a:noFill/>
+          <a:ln/>
+        </p:spPr>
+        <p:txBody>
+          <a:bodyPr wrap="square" rtlCol="0" anchor="ctr"/>
+          <a:lstStyle/>
+          <a:p>
+            <a:pPr marL="0" indent="0" algn="r">
+              <a:buNone/>
+            </a:pPr>
+            <a:r>
+              <a:rPr lang="en-US" sz="900" dirty="0">
+                <a:solidFill>
+                  <a:srgbClr val="CFD7E8"/>
+                </a:solidFill>
+                <a:latin typeface="Microsoft YaHei" pitchFamily="34" charset="0"/>
+                <a:ea typeface="Microsoft YaHei" pitchFamily="34" charset="-122"/>
+                <a:cs typeface="Microsoft YaHei" pitchFamily="34" charset="-120"/>
+              </a:rPr>
+              <a:t>10 / 11</a:t>
+            </a:r>
+            <a:endParaRPr lang="en-US" sz="900" dirty="0"/>
+          </a:p>
+        </p:txBody>
+      </p:sp>
+    </p:spTree>
+  </p:cSld>
+  <p:clrMapOvr>
+    <a:masterClrMapping/>
+  </p:clrMapOvr>
+</p:sld>
+</file>
+
+<file path=ppt/slides/slide11.xml><?xml version="1.0" encoding="utf-8"?>
+<p:sld xmlns:a="http://schemas.openxmlformats.org/drawingml/2006/main" xmlns:r="http://schemas.openxmlformats.org/officeDocument/2006/relationships" xmlns:p="http://schemas.openxmlformats.org/presentationml/2006/main">
   <p:cSld name="Slide 11">
     <p:bg>
       <p:bgPr>
@@ -3473,6 +5034,547 @@
 </file>
 
 <file path=ppt/slides/slide2.xml><?xml version="1.0" encoding="utf-8"?>
+<p:sld xmlns:a="http://schemas.openxmlformats.org/drawingml/2006/main" xmlns:r="http://schemas.openxmlformats.org/officeDocument/2006/relationships" xmlns:p="http://schemas.openxmlformats.org/presentationml/2006/main">
+  <p:cSld name="Slide Bilink">
+    <p:bg>
+      <p:bgPr>
+        <a:solidFill>
+          <a:srgbClr val="FDF7F0"/>
+        </a:solidFill>
+        <a:effectLst/>
+      </p:bgPr>
+    </p:bg>
+    <p:spTree>
+      <p:nvGrpSpPr>
+        <p:cNvPr id="1" name=""/>
+        <p:cNvGrpSpPr/>
+        <p:nvPr/>
+      </p:nvGrpSpPr>
+      <p:grpSpPr>
+        <a:xfrm>
+          <a:off x="0" y="0"/>
+          <a:ext cx="0" cy="0"/>
+          <a:chOff x="0" y="0"/>
+          <a:chExt cx="0" cy="0"/>
+        </a:xfrm>
+      </p:grpSpPr>
+      <p:sp>
+        <p:nvSpPr>
+          <p:cNvPr id="2" name="TitleAccent"/>
+          <p:cNvSpPr/>
+          <p:nvPr/>
+        </p:nvSpPr>
+        <p:spPr>
+          <a:xfrm>
+            <a:off x="457200" y="502920"/>
+            <a:ext cx="109728" cy="457200"/>
+          </a:xfrm>
+          <a:prstGeom prst="rect">
+            <a:avLst/>
+          </a:prstGeom>
+          <a:solidFill>
+            <a:srgbClr val="C69266"/>
+          </a:solidFill>
+          <a:ln w="12700">
+            <a:solidFill>
+              <a:srgbClr val="C69266"/>
+            </a:solidFill>
+            <a:prstDash val="solid"/>
+          </a:ln>
+        </p:spPr>
+        <p:txBody>
+          <a:bodyPr/>
+          <a:lstStyle/>
+          <a:p>
+            <a:endParaRPr lang="zh-CN" altLang="en-US"/>
+          </a:p>
+        </p:txBody>
+      </p:sp>
+      <p:sp>
+        <p:nvSpPr>
+          <p:cNvPr id="3" name="Title"/>
+          <p:cNvSpPr/>
+          <p:nvPr/>
+        </p:nvSpPr>
+        <p:spPr>
+          <a:xfrm>
+            <a:off x="685800" y="365760"/>
+            <a:ext cx="9601200" cy="640080"/>
+          </a:xfrm>
+          <a:prstGeom prst="rect">
+            <a:avLst/>
+          </a:prstGeom>
+          <a:noFill/>
+          <a:ln/>
+        </p:spPr>
+        <p:txBody>
+          <a:bodyPr wrap="square" rtlCol="0" anchor="ctr"/>
+          <a:lstStyle/>
+          <a:p>
+            <a:pPr marL="0" indent="0">
+              <a:buNone/>
+            </a:pPr>
+            <a:r>
+              <a:rPr lang="zh-CN" altLang="en-US" sz="2600" b="1">
+                <a:solidFill>
+                  <a:srgbClr val="1A2B5C"/>
+                </a:solidFill>
+                <a:latin typeface="Microsoft YaHei" pitchFamily="34" charset="0"/>
+                <a:ea typeface="Microsoft YaHei" pitchFamily="34" charset="-122"/>
+                <a:cs typeface="Microsoft YaHei" pitchFamily="34" charset="-120"/>
+              </a:rPr>
+              <a:t>双向链接：定义与应用</a:t>
+            </a:r>
+            <a:endParaRPr lang="zh-CN" sz="2600"/>
+          </a:p>
+        </p:txBody>
+      </p:sp>
+      <p:sp>
+        <p:nvSpPr>
+          <p:cNvPr id="4" name="DefBox"/>
+          <p:cNvSpPr/>
+          <p:nvPr/>
+        </p:nvSpPr>
+        <p:spPr>
+          <a:xfrm>
+            <a:off x="685800" y="1280160"/>
+            <a:ext cx="10820400" cy="1280160"/>
+          </a:xfrm>
+          <a:prstGeom prst="roundRect">
+            <a:avLst>
+              <a:gd name="adj" fmla="val 8000"/>
+            </a:avLst>
+          </a:prstGeom>
+          <a:solidFill>
+            <a:srgbClr val="FFFFFF"/>
+          </a:solidFill>
+          <a:ln w="12700">
+            <a:solidFill>
+              <a:srgbClr val="C69266"/>
+            </a:solidFill>
+          </a:ln>
+        </p:spPr>
+        <p:txBody>
+          <a:bodyPr wrap="square" lIns="182880" tIns="91440" rIns="182880" bIns="91440" rtlCol="0" anchor="ctr"/>
+          <a:lstStyle/>
+          <a:p>
+            <a:pPr marL="0" indent="0" algn="l">
+              <a:buNone/>
+            </a:pPr>
+            <a:r>
+              <a:rPr lang="zh-CN" altLang="en-US" sz="1800" b="1">
+                <a:solidFill>
+                  <a:srgbClr val="C69266"/>
+                </a:solidFill>
+                <a:latin typeface="Microsoft YaHei"/>
+                <a:ea typeface="Microsoft YaHei"/>
+              </a:rPr>
+              <a:t>定义　</a:t>
+            </a:r>
+            <a:r>
+              <a:rPr lang="zh-CN" altLang="en-US" sz="1600">
+                <a:solidFill>
+                  <a:srgbClr val="333333"/>
+                </a:solidFill>
+                <a:latin typeface="Microsoft YaHei"/>
+                <a:ea typeface="Microsoft YaHei"/>
+              </a:rPr>
+              <a:t>双向链接（Bi-directional Link，又称"双链"）是指笔记或文档中两个条目之间相互可见、可互相跳转的引用关系：在 A 中链接 B 后，B 也会自动出现"被 A 引用"的反向记录，从而把零散的笔记编织成一张可双向追溯的知识网络。</a:t>
+            </a:r>
+            <a:endParaRPr lang="zh-CN" sz="1600"/>
+          </a:p>
+        </p:txBody>
+      </p:sp>
+      <p:sp>
+        <p:nvSpPr>
+          <p:cNvPr id="5" name="AppHeader"/>
+          <p:cNvSpPr/>
+          <p:nvPr/>
+        </p:nvSpPr>
+        <p:spPr>
+          <a:xfrm>
+            <a:off x="685800" y="2697480"/>
+            <a:ext cx="10820400" cy="365760"/>
+          </a:xfrm>
+          <a:prstGeom prst="rect">
+            <a:avLst/>
+          </a:prstGeom>
+          <a:noFill/>
+          <a:ln/>
+        </p:spPr>
+        <p:txBody>
+          <a:bodyPr wrap="square" rtlCol="0" anchor="ctr"/>
+          <a:lstStyle/>
+          <a:p>
+            <a:pPr marL="0" indent="0">
+              <a:buNone/>
+            </a:pPr>
+            <a:r>
+              <a:rPr lang="zh-CN" altLang="en-US" sz="2000" b="1">
+                <a:solidFill>
+                  <a:srgbClr val="1A2B5C"/>
+                </a:solidFill>
+                <a:latin typeface="Microsoft YaHei"/>
+                <a:ea typeface="Microsoft YaHei"/>
+              </a:rPr>
+              <a:t>当前主要应用场景</a:t>
+            </a:r>
+          </a:p>
+        </p:txBody>
+      </p:sp>
+      <p:sp>
+        <p:nvSpPr>
+          <p:cNvPr id="6" name="Card1"/>
+          <p:cNvSpPr/>
+          <p:nvPr/>
+        </p:nvSpPr>
+        <p:spPr>
+          <a:xfrm>
+            <a:off x="685800" y="3154680"/>
+            <a:ext cx="2606040" cy="2926080"/>
+          </a:xfrm>
+          <a:prstGeom prst="roundRect">
+            <a:avLst>
+              <a:gd name="adj" fmla="val 6000"/>
+            </a:avLst>
+          </a:prstGeom>
+          <a:solidFill>
+            <a:srgbClr val="FFFFFF"/>
+          </a:solidFill>
+          <a:ln w="12700">
+            <a:solidFill>
+              <a:srgbClr val="E5D6C2"/>
+            </a:solidFill>
+          </a:ln>
+        </p:spPr>
+        <p:txBody>
+          <a:bodyPr wrap="square" lIns="182880" tIns="182880" rIns="182880" bIns="182880" rtlCol="0" anchor="t"/>
+          <a:lstStyle/>
+          <a:p>
+            <a:pPr marL="0" indent="0">
+              <a:buNone/>
+            </a:pPr>
+            <a:r>
+              <a:rPr lang="zh-CN" altLang="en-US" sz="1800" b="1">
+                <a:solidFill>
+                  <a:srgbClr val="C69266"/>
+                </a:solidFill>
+                <a:latin typeface="Microsoft YaHei"/>
+                <a:ea typeface="Microsoft YaHei"/>
+              </a:rPr>
+              <a:t>个人知识管理</a:t>
+            </a:r>
+          </a:p>
+          <a:p>
+            <a:pPr marL="0" indent="0">
+              <a:buNone/>
+            </a:pPr>
+            <a:endParaRPr lang="zh-CN" sz="1000"/>
+          </a:p>
+          <a:p>
+            <a:pPr marL="0" indent="0">
+              <a:buNone/>
+            </a:pPr>
+            <a:r>
+              <a:rPr lang="zh-CN" altLang="en-US" sz="1400">
+                <a:solidFill>
+                  <a:srgbClr val="333333"/>
+                </a:solidFill>
+                <a:latin typeface="Microsoft YaHei"/>
+                <a:ea typeface="Microsoft YaHei"/>
+              </a:rPr>
+              <a:t>Obsidian、Roam Research、Logseq、思源笔记等工具借助双链构建"第二大脑"，让卡片笔记法、Zettelkasten 等方法落地，便于灵感串联与长期复用。</a:t>
+            </a:r>
+          </a:p>
+        </p:txBody>
+      </p:sp>
+      <p:sp>
+        <p:nvSpPr>
+          <p:cNvPr id="7" name="Card2"/>
+          <p:cNvSpPr/>
+          <p:nvPr/>
+        </p:nvSpPr>
+        <p:spPr>
+          <a:xfrm>
+            <a:off x="3429000" y="3154680"/>
+            <a:ext cx="2606040" cy="2926080"/>
+          </a:xfrm>
+          <a:prstGeom prst="roundRect">
+            <a:avLst>
+              <a:gd name="adj" fmla="val 6000"/>
+            </a:avLst>
+          </a:prstGeom>
+          <a:solidFill>
+            <a:srgbClr val="FFFFFF"/>
+          </a:solidFill>
+          <a:ln w="12700">
+            <a:solidFill>
+              <a:srgbClr val="E5D6C2"/>
+            </a:solidFill>
+          </a:ln>
+        </p:spPr>
+        <p:txBody>
+          <a:bodyPr wrap="square" lIns="182880" tIns="182880" rIns="182880" bIns="182880" rtlCol="0" anchor="t"/>
+          <a:lstStyle/>
+          <a:p>
+            <a:pPr marL="0" indent="0">
+              <a:buNone/>
+            </a:pPr>
+            <a:r>
+              <a:rPr lang="zh-CN" altLang="en-US" sz="1800" b="1">
+                <a:solidFill>
+                  <a:srgbClr val="C69266"/>
+                </a:solidFill>
+                <a:latin typeface="Microsoft YaHei"/>
+                <a:ea typeface="Microsoft YaHei"/>
+              </a:rPr>
+              <a:t>团队协作与文档</a:t>
+            </a:r>
+          </a:p>
+          <a:p>
+            <a:pPr marL="0" indent="0">
+              <a:buNone/>
+            </a:pPr>
+            <a:endParaRPr lang="zh-CN" sz="1000"/>
+          </a:p>
+          <a:p>
+            <a:pPr marL="0" indent="0">
+              <a:buNone/>
+            </a:pPr>
+            <a:r>
+              <a:rPr lang="zh-CN" altLang="en-US" sz="1400">
+                <a:solidFill>
+                  <a:srgbClr val="333333"/>
+                </a:solidFill>
+                <a:latin typeface="Microsoft YaHei"/>
+                <a:ea typeface="Microsoft YaHei"/>
+              </a:rPr>
+              <a:t>Notion、飞书文档、语雀等通过反向链接呈现"被引用情况"，帮助团队梳理项目脉络、追踪需求来源，提升协作透明度与知识沉淀效率。</a:t>
+            </a:r>
+          </a:p>
+        </p:txBody>
+      </p:sp>
+      <p:sp>
+        <p:nvSpPr>
+          <p:cNvPr id="8" name="Card3"/>
+          <p:cNvSpPr/>
+          <p:nvPr/>
+        </p:nvSpPr>
+        <p:spPr>
+          <a:xfrm>
+            <a:off x="6172200" y="3154680"/>
+            <a:ext cx="2606040" cy="2926080"/>
+          </a:xfrm>
+          <a:prstGeom prst="roundRect">
+            <a:avLst>
+              <a:gd name="adj" fmla="val 6000"/>
+            </a:avLst>
+          </a:prstGeom>
+          <a:solidFill>
+            <a:srgbClr val="FFFFFF"/>
+          </a:solidFill>
+          <a:ln w="12700">
+            <a:solidFill>
+              <a:srgbClr val="E5D6C2"/>
+            </a:solidFill>
+          </a:ln>
+        </p:spPr>
+        <p:txBody>
+          <a:bodyPr wrap="square" lIns="182880" tIns="182880" rIns="182880" bIns="182880" rtlCol="0" anchor="t"/>
+          <a:lstStyle/>
+          <a:p>
+            <a:pPr marL="0" indent="0">
+              <a:buNone/>
+            </a:pPr>
+            <a:r>
+              <a:rPr lang="zh-CN" altLang="en-US" sz="1800" b="1" dirty="0">
+                <a:solidFill>
+                  <a:srgbClr val="C69266"/>
+                </a:solidFill>
+                <a:latin typeface="Microsoft YaHei"/>
+                <a:ea typeface="Microsoft YaHei"/>
+              </a:rPr>
+              <a:t>科研与教学</a:t>
+            </a:r>
+          </a:p>
+          <a:p>
+            <a:pPr marL="0" indent="0">
+              <a:buNone/>
+            </a:pPr>
+            <a:endParaRPr lang="zh-CN" sz="1000" dirty="0"/>
+          </a:p>
+          <a:p>
+            <a:pPr marL="0" indent="0">
+              <a:buNone/>
+            </a:pPr>
+            <a:r>
+              <a:rPr lang="zh-CN" altLang="en-US" sz="1400" dirty="0">
+                <a:solidFill>
+                  <a:srgbClr val="333333"/>
+                </a:solidFill>
+                <a:latin typeface="Microsoft YaHei"/>
+                <a:ea typeface="Microsoft YaHei"/>
+              </a:rPr>
+              <a:t>文献综述与论文写作中用于关联文献、概念与论点；可视化知识图谱直观呈现引用关系，帮助研究者发现脉络与空白点。</a:t>
+            </a:r>
+          </a:p>
+        </p:txBody>
+      </p:sp>
+      <p:sp>
+        <p:nvSpPr>
+          <p:cNvPr id="9" name="Card4"/>
+          <p:cNvSpPr/>
+          <p:nvPr/>
+        </p:nvSpPr>
+        <p:spPr>
+          <a:xfrm>
+            <a:off x="8915400" y="3154680"/>
+            <a:ext cx="2606040" cy="2926080"/>
+          </a:xfrm>
+          <a:prstGeom prst="roundRect">
+            <a:avLst>
+              <a:gd name="adj" fmla="val 6000"/>
+            </a:avLst>
+          </a:prstGeom>
+          <a:solidFill>
+            <a:srgbClr val="FFFFFF"/>
+          </a:solidFill>
+          <a:ln w="12700">
+            <a:solidFill>
+              <a:srgbClr val="E5D6C2"/>
+            </a:solidFill>
+          </a:ln>
+        </p:spPr>
+        <p:txBody>
+          <a:bodyPr wrap="square" lIns="182880" tIns="182880" rIns="182880" bIns="182880" rtlCol="0" anchor="t"/>
+          <a:lstStyle/>
+          <a:p>
+            <a:pPr marL="0" indent="0">
+              <a:buNone/>
+            </a:pPr>
+            <a:r>
+              <a:rPr lang="zh-CN" altLang="en-US" sz="1800" b="1" dirty="0">
+                <a:solidFill>
+                  <a:srgbClr val="C69266"/>
+                </a:solidFill>
+                <a:latin typeface="Microsoft YaHei"/>
+                <a:ea typeface="Microsoft YaHei"/>
+              </a:rPr>
+              <a:t>知识图谱</a:t>
+            </a:r>
+          </a:p>
+          <a:p>
+            <a:pPr marL="0" indent="0">
+              <a:buNone/>
+            </a:pPr>
+            <a:endParaRPr lang="zh-CN" sz="1000" dirty="0"/>
+          </a:p>
+          <a:p>
+            <a:pPr marL="0" indent="0">
+              <a:buNone/>
+            </a:pPr>
+            <a:r>
+              <a:rPr lang="zh-CN" altLang="en-US" sz="1400" dirty="0">
+                <a:solidFill>
+                  <a:srgbClr val="333333"/>
+                </a:solidFill>
+                <a:latin typeface="Microsoft YaHei"/>
+                <a:ea typeface="Microsoft YaHei"/>
+              </a:rPr>
+              <a:t>双链</a:t>
+            </a:r>
+            <a:r>
+              <a:rPr lang="zh-CN" altLang="en-US" sz="1400">
+                <a:solidFill>
+                  <a:srgbClr val="333333"/>
+                </a:solidFill>
+                <a:latin typeface="Microsoft YaHei"/>
+                <a:ea typeface="Microsoft YaHei"/>
+              </a:rPr>
+              <a:t>天然形成节点—关系</a:t>
+            </a:r>
+            <a:r>
+              <a:rPr lang="zh-CN" altLang="en-US" sz="1400" dirty="0">
+                <a:solidFill>
+                  <a:srgbClr val="333333"/>
+                </a:solidFill>
+                <a:latin typeface="Microsoft YaHei"/>
+                <a:ea typeface="Microsoft YaHei"/>
+              </a:rPr>
+              <a:t>网络，</a:t>
+            </a:r>
+            <a:r>
+              <a:rPr lang="zh-CN" altLang="en-US" sz="1400">
+                <a:solidFill>
+                  <a:srgbClr val="333333"/>
+                </a:solidFill>
+                <a:latin typeface="Microsoft YaHei"/>
+                <a:ea typeface="Microsoft YaHei"/>
+              </a:rPr>
+              <a:t>可直接生成可视化知识图谱：清晰呈现概念之间</a:t>
+            </a:r>
+            <a:r>
+              <a:rPr lang="zh-CN" altLang="en-US" sz="1400" dirty="0">
+                <a:solidFill>
+                  <a:srgbClr val="333333"/>
+                </a:solidFill>
+                <a:latin typeface="Microsoft YaHei"/>
+                <a:ea typeface="Microsoft YaHei"/>
+              </a:rPr>
+              <a:t>的</a:t>
+            </a:r>
+            <a:r>
+              <a:rPr lang="zh-CN" altLang="en-US" sz="1400">
+                <a:solidFill>
+                  <a:srgbClr val="333333"/>
+                </a:solidFill>
+                <a:latin typeface="Microsoft YaHei"/>
+                <a:ea typeface="Microsoft YaHei"/>
+              </a:rPr>
+              <a:t>引用脉络，便于发现主题聚类、空白点</a:t>
+            </a:r>
+            <a:r>
+              <a:rPr lang="zh-CN" altLang="en-US" sz="1400" dirty="0">
+                <a:solidFill>
+                  <a:srgbClr val="333333"/>
+                </a:solidFill>
+                <a:latin typeface="Microsoft YaHei"/>
+                <a:ea typeface="Microsoft YaHei"/>
+              </a:rPr>
+              <a:t>与</a:t>
+            </a:r>
+            <a:r>
+              <a:rPr lang="zh-CN" altLang="en-US" sz="1400">
+                <a:solidFill>
+                  <a:srgbClr val="333333"/>
+                </a:solidFill>
+                <a:latin typeface="Microsoft YaHei"/>
+                <a:ea typeface="Microsoft YaHei"/>
+              </a:rPr>
+              <a:t>跨领域关联</a:t>
+            </a:r>
+            <a:r>
+              <a:rPr lang="zh-CN" altLang="en-US" sz="1400" dirty="0">
+                <a:solidFill>
+                  <a:srgbClr val="333333"/>
+                </a:solidFill>
+                <a:latin typeface="Microsoft YaHei"/>
+                <a:ea typeface="Microsoft YaHei"/>
+              </a:rPr>
+              <a:t>。</a:t>
+            </a:r>
+          </a:p>
+        </p:txBody>
+      </p:sp>
+    </p:spTree>
+  </p:cSld>
+  <p:clrMapOvr>
+    <a:masterClrMapping/>
+  </p:clrMapOvr>
+</p:sld>
+</file>
+
+<file path=ppt/slides/slide3.xml><?xml version="1.0" encoding="utf-8"?>
 <p:sld xmlns:a="http://schemas.openxmlformats.org/drawingml/2006/main" xmlns:r="http://schemas.openxmlformats.org/officeDocument/2006/relationships" xmlns:p="http://schemas.openxmlformats.org/presentationml/2006/main">
   <p:cSld name="Slide 2">
     <p:bg>
@@ -4622,7 +6724,7 @@
 </p:sld>
 </file>
 
-<file path=ppt/slides/slide3.xml><?xml version="1.0" encoding="utf-8"?>
+<file path=ppt/slides/slide4.xml><?xml version="1.0" encoding="utf-8"?>
 <p:sld xmlns:a="http://schemas.openxmlformats.org/drawingml/2006/main" xmlns:r="http://schemas.openxmlformats.org/officeDocument/2006/relationships" xmlns:p="http://schemas.openxmlformats.org/presentationml/2006/main">
   <p:cSld name="Slide 3">
     <p:bg>
@@ -6487,7 +8589,7 @@
 </p:sld>
 </file>
 
-<file path=ppt/slides/slide4.xml><?xml version="1.0" encoding="utf-8"?>
+<file path=ppt/slides/slide5.xml><?xml version="1.0" encoding="utf-8"?>
 <p:sld xmlns:a="http://schemas.openxmlformats.org/drawingml/2006/main" xmlns:r="http://schemas.openxmlformats.org/officeDocument/2006/relationships" xmlns:p="http://schemas.openxmlformats.org/presentationml/2006/main">
   <p:cSld name="Slide 4">
     <p:bg>
@@ -7782,7 +9884,7 @@
 </p:sld>
 </file>
 
-<file path=ppt/slides/slide5.xml><?xml version="1.0" encoding="utf-8"?>
+<file path=ppt/slides/slide6.xml><?xml version="1.0" encoding="utf-8"?>
 <p:sld xmlns:a="http://schemas.openxmlformats.org/drawingml/2006/main" xmlns:r="http://schemas.openxmlformats.org/officeDocument/2006/relationships" xmlns:p="http://schemas.openxmlformats.org/presentationml/2006/main">
   <p:cSld name="Slide 5">
     <p:bg>
@@ -9730,7 +11832,7 @@
 </p:sld>
 </file>
 
-<file path=ppt/slides/slide6.xml><?xml version="1.0" encoding="utf-8"?>
+<file path=ppt/slides/slide7.xml><?xml version="1.0" encoding="utf-8"?>
 <p:sld xmlns:a="http://schemas.openxmlformats.org/drawingml/2006/main" xmlns:r="http://schemas.openxmlformats.org/officeDocument/2006/relationships" xmlns:p="http://schemas.openxmlformats.org/presentationml/2006/main">
   <p:cSld name="Slide 6">
     <p:bg>
@@ -11186,7 +13288,7 @@
 </p:sld>
 </file>
 
-<file path=ppt/slides/slide7.xml><?xml version="1.0" encoding="utf-8"?>
+<file path=ppt/slides/slide8.xml><?xml version="1.0" encoding="utf-8"?>
 <p:sld xmlns:a="http://schemas.openxmlformats.org/drawingml/2006/main" xmlns:r="http://schemas.openxmlformats.org/officeDocument/2006/relationships" xmlns:p="http://schemas.openxmlformats.org/presentationml/2006/main">
   <p:cSld name="Slide 7">
     <p:bg>
@@ -12318,7 +14420,7 @@
 </p:sld>
 </file>
 
-<file path=ppt/slides/slide8.xml><?xml version="1.0" encoding="utf-8"?>
+<file path=ppt/slides/slide9.xml><?xml version="1.0" encoding="utf-8"?>
 <p:sld xmlns:a="http://schemas.openxmlformats.org/drawingml/2006/main" xmlns:r="http://schemas.openxmlformats.org/officeDocument/2006/relationships" xmlns:p="http://schemas.openxmlformats.org/presentationml/2006/main">
   <p:cSld name="Slide 9">
     <p:bg>
@@ -13396,1551 +15498,6 @@
                 <a:cs typeface="Microsoft YaHei" pitchFamily="34" charset="-120"/>
               </a:rPr>
               <a:t>9 / 11</a:t>
-            </a:r>
-            <a:endParaRPr lang="en-US" sz="900" dirty="0"/>
-          </a:p>
-        </p:txBody>
-      </p:sp>
-    </p:spTree>
-  </p:cSld>
-  <p:clrMapOvr>
-    <a:masterClrMapping/>
-  </p:clrMapOvr>
-</p:sld>
-</file>
-
-<file path=ppt/slides/slide9.xml><?xml version="1.0" encoding="utf-8"?>
-<p:sld xmlns:a="http://schemas.openxmlformats.org/drawingml/2006/main" xmlns:r="http://schemas.openxmlformats.org/officeDocument/2006/relationships" xmlns:p="http://schemas.openxmlformats.org/presentationml/2006/main">
-  <p:cSld name="Slide 10">
-    <p:bg>
-      <p:bgPr>
-        <a:solidFill>
-          <a:srgbClr val="FDF7F0"/>
-        </a:solidFill>
-        <a:effectLst/>
-      </p:bgPr>
-    </p:bg>
-    <p:spTree>
-      <p:nvGrpSpPr>
-        <p:cNvPr id="1" name=""/>
-        <p:cNvGrpSpPr/>
-        <p:nvPr/>
-      </p:nvGrpSpPr>
-      <p:grpSpPr>
-        <a:xfrm>
-          <a:off x="0" y="0"/>
-          <a:ext cx="0" cy="0"/>
-          <a:chOff x="0" y="0"/>
-          <a:chExt cx="0" cy="0"/>
-        </a:xfrm>
-      </p:grpSpPr>
-      <p:sp>
-        <p:nvSpPr>
-          <p:cNvPr id="2" name="Shape 0"/>
-          <p:cNvSpPr/>
-          <p:nvPr/>
-        </p:nvSpPr>
-        <p:spPr>
-          <a:xfrm>
-            <a:off x="457200" y="502920"/>
-            <a:ext cx="109728" cy="457200"/>
-          </a:xfrm>
-          <a:prstGeom prst="rect">
-            <a:avLst/>
-          </a:prstGeom>
-          <a:solidFill>
-            <a:srgbClr val="C69266"/>
-          </a:solidFill>
-          <a:ln w="12700">
-            <a:solidFill>
-              <a:srgbClr val="C69266"/>
-            </a:solidFill>
-            <a:prstDash val="solid"/>
-          </a:ln>
-        </p:spPr>
-        <p:txBody>
-          <a:bodyPr/>
-          <a:lstStyle/>
-          <a:p>
-            <a:endParaRPr lang="zh-CN" altLang="en-US"/>
-          </a:p>
-        </p:txBody>
-      </p:sp>
-      <p:sp>
-        <p:nvSpPr>
-          <p:cNvPr id="3" name="Text 1"/>
-          <p:cNvSpPr/>
-          <p:nvPr/>
-        </p:nvSpPr>
-        <p:spPr>
-          <a:xfrm>
-            <a:off x="685800" y="365760"/>
-            <a:ext cx="9601200" cy="640080"/>
-          </a:xfrm>
-          <a:prstGeom prst="rect">
-            <a:avLst/>
-          </a:prstGeom>
-          <a:noFill/>
-          <a:ln/>
-        </p:spPr>
-        <p:txBody>
-          <a:bodyPr wrap="square" rtlCol="0" anchor="ctr"/>
-          <a:lstStyle/>
-          <a:p>
-            <a:pPr marL="0" indent="0">
-              <a:buNone/>
-            </a:pPr>
-            <a:r>
-              <a:rPr lang="en-US" sz="2600" b="1" dirty="0">
-                <a:solidFill>
-                  <a:srgbClr val="1A2B5C"/>
-                </a:solidFill>
-                <a:latin typeface="Microsoft YaHei" pitchFamily="34" charset="0"/>
-                <a:ea typeface="Microsoft YaHei" pitchFamily="34" charset="-122"/>
-                <a:cs typeface="Microsoft YaHei" pitchFamily="34" charset="-120"/>
-              </a:rPr>
-              <a:t>不足与后续改进方向</a:t>
-            </a:r>
-            <a:endParaRPr lang="en-US" sz="2600" dirty="0"/>
-          </a:p>
-        </p:txBody>
-      </p:sp>
-      <p:sp>
-        <p:nvSpPr>
-          <p:cNvPr id="4" name="Text 2"/>
-          <p:cNvSpPr/>
-          <p:nvPr/>
-        </p:nvSpPr>
-        <p:spPr>
-          <a:xfrm>
-            <a:off x="10332720" y="457200"/>
-            <a:ext cx="1463040" cy="457200"/>
-          </a:xfrm>
-          <a:prstGeom prst="rect">
-            <a:avLst/>
-          </a:prstGeom>
-          <a:noFill/>
-          <a:ln/>
-        </p:spPr>
-        <p:txBody>
-          <a:bodyPr wrap="square" rtlCol="0" anchor="ctr"/>
-          <a:lstStyle/>
-          <a:p>
-            <a:pPr marL="0" indent="0" algn="r">
-              <a:buNone/>
-            </a:pPr>
-            <a:r>
-              <a:rPr lang="en-US" sz="1100" dirty="0">
-                <a:solidFill>
-                  <a:srgbClr val="6B7280"/>
-                </a:solidFill>
-                <a:latin typeface="Microsoft YaHei" pitchFamily="34" charset="0"/>
-                <a:ea typeface="Microsoft YaHei" pitchFamily="34" charset="-122"/>
-                <a:cs typeface="Microsoft YaHei" pitchFamily="34" charset="-120"/>
-              </a:rPr>
-              <a:t>09 / 改进方向</a:t>
-            </a:r>
-            <a:endParaRPr lang="en-US" sz="1100" dirty="0"/>
-          </a:p>
-        </p:txBody>
-      </p:sp>
-      <p:sp>
-        <p:nvSpPr>
-          <p:cNvPr id="5" name="Shape 3"/>
-          <p:cNvSpPr/>
-          <p:nvPr/>
-        </p:nvSpPr>
-        <p:spPr>
-          <a:xfrm>
-            <a:off x="457200" y="1097280"/>
-            <a:ext cx="11277295" cy="0"/>
-          </a:xfrm>
-          <a:prstGeom prst="line">
-            <a:avLst/>
-          </a:prstGeom>
-          <a:noFill/>
-          <a:ln w="9525">
-            <a:solidFill>
-              <a:srgbClr val="D9CDBF"/>
-            </a:solidFill>
-            <a:prstDash val="solid"/>
-          </a:ln>
-        </p:spPr>
-        <p:txBody>
-          <a:bodyPr/>
-          <a:lstStyle/>
-          <a:p>
-            <a:endParaRPr lang="zh-CN" altLang="en-US"/>
-          </a:p>
-        </p:txBody>
-      </p:sp>
-      <p:sp>
-        <p:nvSpPr>
-          <p:cNvPr id="6" name="Shape 4"/>
-          <p:cNvSpPr/>
-          <p:nvPr/>
-        </p:nvSpPr>
-        <p:spPr>
-          <a:xfrm>
-            <a:off x="457200" y="1371600"/>
-            <a:ext cx="5486400" cy="4206240"/>
-          </a:xfrm>
-          <a:prstGeom prst="roundRect">
-            <a:avLst>
-              <a:gd name="adj" fmla="val 1739"/>
-            </a:avLst>
-          </a:prstGeom>
-          <a:solidFill>
-            <a:srgbClr val="F6ECE0"/>
-          </a:solidFill>
-          <a:ln w="9525">
-            <a:solidFill>
-              <a:srgbClr val="D9CDBF"/>
-            </a:solidFill>
-            <a:prstDash val="solid"/>
-          </a:ln>
-        </p:spPr>
-        <p:txBody>
-          <a:bodyPr/>
-          <a:lstStyle/>
-          <a:p>
-            <a:endParaRPr lang="zh-CN" altLang="en-US"/>
-          </a:p>
-        </p:txBody>
-      </p:sp>
-      <p:sp>
-        <p:nvSpPr>
-          <p:cNvPr id="7" name="Shape 5"/>
-          <p:cNvSpPr/>
-          <p:nvPr/>
-        </p:nvSpPr>
-        <p:spPr>
-          <a:xfrm>
-            <a:off x="457200" y="1371600"/>
-            <a:ext cx="5486400" cy="91440"/>
-          </a:xfrm>
-          <a:prstGeom prst="rect">
-            <a:avLst/>
-          </a:prstGeom>
-          <a:solidFill>
-            <a:srgbClr val="C69266"/>
-          </a:solidFill>
-          <a:ln w="12700">
-            <a:solidFill>
-              <a:srgbClr val="C69266"/>
-            </a:solidFill>
-            <a:prstDash val="solid"/>
-          </a:ln>
-        </p:spPr>
-        <p:txBody>
-          <a:bodyPr/>
-          <a:lstStyle/>
-          <a:p>
-            <a:endParaRPr lang="zh-CN" altLang="en-US"/>
-          </a:p>
-        </p:txBody>
-      </p:sp>
-      <p:sp>
-        <p:nvSpPr>
-          <p:cNvPr id="8" name="Text 6"/>
-          <p:cNvSpPr/>
-          <p:nvPr/>
-        </p:nvSpPr>
-        <p:spPr>
-          <a:xfrm>
-            <a:off x="731520" y="1600200"/>
-            <a:ext cx="4937760" cy="457200"/>
-          </a:xfrm>
-          <a:prstGeom prst="rect">
-            <a:avLst/>
-          </a:prstGeom>
-          <a:noFill/>
-          <a:ln/>
-        </p:spPr>
-        <p:txBody>
-          <a:bodyPr wrap="square" rtlCol="0" anchor="ctr"/>
-          <a:lstStyle/>
-          <a:p>
-            <a:pPr marL="0" indent="0">
-              <a:buNone/>
-            </a:pPr>
-            <a:r>
-              <a:rPr lang="en-US" sz="1800" b="1" dirty="0">
-                <a:solidFill>
-                  <a:srgbClr val="1A2B5C"/>
-                </a:solidFill>
-                <a:latin typeface="Microsoft YaHei" pitchFamily="34" charset="0"/>
-                <a:ea typeface="Microsoft YaHei" pitchFamily="34" charset="-122"/>
-                <a:cs typeface="Microsoft YaHei" pitchFamily="34" charset="-120"/>
-              </a:rPr>
-              <a:t>当前不足</a:t>
-            </a:r>
-            <a:endParaRPr lang="en-US" sz="1800" dirty="0"/>
-          </a:p>
-        </p:txBody>
-      </p:sp>
-      <p:sp>
-        <p:nvSpPr>
-          <p:cNvPr id="9" name="Shape 7"/>
-          <p:cNvSpPr/>
-          <p:nvPr/>
-        </p:nvSpPr>
-        <p:spPr>
-          <a:xfrm>
-            <a:off x="731520" y="2194560"/>
-            <a:ext cx="384048" cy="384048"/>
-          </a:xfrm>
-          <a:prstGeom prst="roundRect">
-            <a:avLst>
-              <a:gd name="adj" fmla="val 19048"/>
-            </a:avLst>
-          </a:prstGeom>
-          <a:solidFill>
-            <a:srgbClr val="C69266"/>
-          </a:solidFill>
-          <a:ln w="12700">
-            <a:solidFill>
-              <a:srgbClr val="C69266"/>
-            </a:solidFill>
-            <a:prstDash val="solid"/>
-          </a:ln>
-        </p:spPr>
-        <p:txBody>
-          <a:bodyPr/>
-          <a:lstStyle/>
-          <a:p>
-            <a:endParaRPr lang="zh-CN" altLang="en-US"/>
-          </a:p>
-        </p:txBody>
-      </p:sp>
-      <p:sp>
-        <p:nvSpPr>
-          <p:cNvPr id="10" name="Text 8"/>
-          <p:cNvSpPr/>
-          <p:nvPr/>
-        </p:nvSpPr>
-        <p:spPr>
-          <a:xfrm>
-            <a:off x="731520" y="2194560"/>
-            <a:ext cx="384048" cy="384048"/>
-          </a:xfrm>
-          <a:prstGeom prst="rect">
-            <a:avLst/>
-          </a:prstGeom>
-          <a:noFill/>
-          <a:ln/>
-        </p:spPr>
-        <p:txBody>
-          <a:bodyPr wrap="square" rtlCol="0" anchor="ctr"/>
-          <a:lstStyle/>
-          <a:p>
-            <a:pPr marL="0" indent="0" algn="ctr">
-              <a:buNone/>
-            </a:pPr>
-            <a:r>
-              <a:rPr lang="en-US" sz="1300" b="1" dirty="0">
-                <a:solidFill>
-                  <a:srgbClr val="FFFFFF"/>
-                </a:solidFill>
-                <a:latin typeface="Georgia" pitchFamily="34" charset="0"/>
-                <a:ea typeface="Georgia" pitchFamily="34" charset="-122"/>
-                <a:cs typeface="Georgia" pitchFamily="34" charset="-120"/>
-              </a:rPr>
-              <a:t>1</a:t>
-            </a:r>
-            <a:endParaRPr lang="en-US" sz="1300" dirty="0"/>
-          </a:p>
-        </p:txBody>
-      </p:sp>
-      <p:sp>
-        <p:nvSpPr>
-          <p:cNvPr id="11" name="Text 9"/>
-          <p:cNvSpPr/>
-          <p:nvPr/>
-        </p:nvSpPr>
-        <p:spPr>
-          <a:xfrm>
-            <a:off x="1234440" y="2148840"/>
-            <a:ext cx="4434840" cy="502920"/>
-          </a:xfrm>
-          <a:prstGeom prst="rect">
-            <a:avLst/>
-          </a:prstGeom>
-          <a:noFill/>
-          <a:ln/>
-        </p:spPr>
-        <p:txBody>
-          <a:bodyPr wrap="square" rtlCol="0" anchor="ctr"/>
-          <a:lstStyle/>
-          <a:p>
-            <a:pPr marL="0" indent="0">
-              <a:buNone/>
-            </a:pPr>
-            <a:r>
-              <a:rPr lang="zh-CN" altLang="en-US" sz="1200" dirty="0">
-                <a:solidFill>
-                  <a:srgbClr val="1F2937"/>
-                </a:solidFill>
-                <a:latin typeface="Microsoft YaHei" pitchFamily="34" charset="0"/>
-                <a:ea typeface="Microsoft YaHei" pitchFamily="34" charset="-122"/>
-                <a:cs typeface="Microsoft YaHei" pitchFamily="34" charset="-120"/>
-              </a:rPr>
-              <a:t>受数据库唯一性约束影响，</a:t>
-            </a:r>
-            <a:r>
-              <a:rPr lang="en-US" sz="1200" dirty="0" err="1">
-                <a:solidFill>
-                  <a:srgbClr val="1F2937"/>
-                </a:solidFill>
-                <a:latin typeface="Microsoft YaHei" pitchFamily="34" charset="0"/>
-                <a:ea typeface="Microsoft YaHei" pitchFamily="34" charset="-122"/>
-                <a:cs typeface="Microsoft YaHei" pitchFamily="34" charset="-120"/>
-              </a:rPr>
-              <a:t>回收站尚未完成，目前主要依赖软删除字段</a:t>
-            </a:r>
-            <a:endParaRPr lang="en-US" sz="1200" dirty="0"/>
-          </a:p>
-        </p:txBody>
-      </p:sp>
-      <p:sp>
-        <p:nvSpPr>
-          <p:cNvPr id="12" name="Shape 10"/>
-          <p:cNvSpPr/>
-          <p:nvPr/>
-        </p:nvSpPr>
-        <p:spPr>
-          <a:xfrm>
-            <a:off x="731520" y="3017520"/>
-            <a:ext cx="384048" cy="384048"/>
-          </a:xfrm>
-          <a:prstGeom prst="roundRect">
-            <a:avLst>
-              <a:gd name="adj" fmla="val 19048"/>
-            </a:avLst>
-          </a:prstGeom>
-          <a:solidFill>
-            <a:srgbClr val="C69266"/>
-          </a:solidFill>
-          <a:ln w="12700">
-            <a:solidFill>
-              <a:srgbClr val="C69266"/>
-            </a:solidFill>
-            <a:prstDash val="solid"/>
-          </a:ln>
-        </p:spPr>
-        <p:txBody>
-          <a:bodyPr/>
-          <a:lstStyle/>
-          <a:p>
-            <a:endParaRPr lang="zh-CN" altLang="en-US"/>
-          </a:p>
-        </p:txBody>
-      </p:sp>
-      <p:sp>
-        <p:nvSpPr>
-          <p:cNvPr id="13" name="Text 11"/>
-          <p:cNvSpPr/>
-          <p:nvPr/>
-        </p:nvSpPr>
-        <p:spPr>
-          <a:xfrm>
-            <a:off x="731520" y="3017520"/>
-            <a:ext cx="384048" cy="384048"/>
-          </a:xfrm>
-          <a:prstGeom prst="rect">
-            <a:avLst/>
-          </a:prstGeom>
-          <a:noFill/>
-          <a:ln/>
-        </p:spPr>
-        <p:txBody>
-          <a:bodyPr wrap="square" rtlCol="0" anchor="ctr"/>
-          <a:lstStyle/>
-          <a:p>
-            <a:pPr marL="0" indent="0" algn="ctr">
-              <a:buNone/>
-            </a:pPr>
-            <a:r>
-              <a:rPr lang="en-US" sz="1300" b="1" dirty="0">
-                <a:solidFill>
-                  <a:srgbClr val="FFFFFF"/>
-                </a:solidFill>
-                <a:latin typeface="Georgia" pitchFamily="34" charset="0"/>
-                <a:ea typeface="Georgia" pitchFamily="34" charset="-122"/>
-                <a:cs typeface="Georgia" pitchFamily="34" charset="-120"/>
-              </a:rPr>
-              <a:t>2</a:t>
-            </a:r>
-            <a:endParaRPr lang="en-US" sz="1300" dirty="0"/>
-          </a:p>
-        </p:txBody>
-      </p:sp>
-      <p:sp>
-        <p:nvSpPr>
-          <p:cNvPr id="14" name="Text 12"/>
-          <p:cNvSpPr/>
-          <p:nvPr/>
-        </p:nvSpPr>
-        <p:spPr>
-          <a:xfrm>
-            <a:off x="1234440" y="2971800"/>
-            <a:ext cx="4434840" cy="502920"/>
-          </a:xfrm>
-          <a:prstGeom prst="rect">
-            <a:avLst/>
-          </a:prstGeom>
-          <a:noFill/>
-          <a:ln/>
-        </p:spPr>
-        <p:txBody>
-          <a:bodyPr wrap="square" rtlCol="0" anchor="ctr"/>
-          <a:lstStyle/>
-          <a:p>
-            <a:pPr marL="0" indent="0">
-              <a:buNone/>
-            </a:pPr>
-            <a:r>
-              <a:rPr lang="en-US" sz="1200" dirty="0">
-                <a:solidFill>
-                  <a:srgbClr val="1F2937"/>
-                </a:solidFill>
-                <a:latin typeface="Microsoft YaHei" pitchFamily="34" charset="0"/>
-                <a:ea typeface="Microsoft YaHei" pitchFamily="34" charset="-122"/>
-                <a:cs typeface="Microsoft YaHei" pitchFamily="34" charset="-120"/>
-              </a:rPr>
-              <a:t>知识图谱以全局图为主，局部关系分析仍可细化</a:t>
-            </a:r>
-            <a:endParaRPr lang="en-US" sz="1200" dirty="0"/>
-          </a:p>
-        </p:txBody>
-      </p:sp>
-      <p:sp>
-        <p:nvSpPr>
-          <p:cNvPr id="15" name="Shape 13"/>
-          <p:cNvSpPr/>
-          <p:nvPr/>
-        </p:nvSpPr>
-        <p:spPr>
-          <a:xfrm>
-            <a:off x="731520" y="3840480"/>
-            <a:ext cx="384048" cy="384048"/>
-          </a:xfrm>
-          <a:prstGeom prst="roundRect">
-            <a:avLst>
-              <a:gd name="adj" fmla="val 19048"/>
-            </a:avLst>
-          </a:prstGeom>
-          <a:solidFill>
-            <a:srgbClr val="C69266"/>
-          </a:solidFill>
-          <a:ln w="12700">
-            <a:solidFill>
-              <a:srgbClr val="C69266"/>
-            </a:solidFill>
-            <a:prstDash val="solid"/>
-          </a:ln>
-        </p:spPr>
-        <p:txBody>
-          <a:bodyPr/>
-          <a:lstStyle/>
-          <a:p>
-            <a:endParaRPr lang="zh-CN" altLang="en-US"/>
-          </a:p>
-        </p:txBody>
-      </p:sp>
-      <p:sp>
-        <p:nvSpPr>
-          <p:cNvPr id="16" name="Text 14"/>
-          <p:cNvSpPr/>
-          <p:nvPr/>
-        </p:nvSpPr>
-        <p:spPr>
-          <a:xfrm>
-            <a:off x="731520" y="3840480"/>
-            <a:ext cx="384048" cy="384048"/>
-          </a:xfrm>
-          <a:prstGeom prst="rect">
-            <a:avLst/>
-          </a:prstGeom>
-          <a:noFill/>
-          <a:ln/>
-        </p:spPr>
-        <p:txBody>
-          <a:bodyPr wrap="square" rtlCol="0" anchor="ctr"/>
-          <a:lstStyle/>
-          <a:p>
-            <a:pPr marL="0" indent="0" algn="ctr">
-              <a:buNone/>
-            </a:pPr>
-            <a:r>
-              <a:rPr lang="en-US" sz="1300" b="1" dirty="0">
-                <a:solidFill>
-                  <a:srgbClr val="FFFFFF"/>
-                </a:solidFill>
-                <a:latin typeface="Georgia" pitchFamily="34" charset="0"/>
-                <a:ea typeface="Georgia" pitchFamily="34" charset="-122"/>
-                <a:cs typeface="Georgia" pitchFamily="34" charset="-120"/>
-              </a:rPr>
-              <a:t>3</a:t>
-            </a:r>
-            <a:endParaRPr lang="en-US" sz="1300" dirty="0"/>
-          </a:p>
-        </p:txBody>
-      </p:sp>
-      <p:sp>
-        <p:nvSpPr>
-          <p:cNvPr id="17" name="Text 15"/>
-          <p:cNvSpPr/>
-          <p:nvPr/>
-        </p:nvSpPr>
-        <p:spPr>
-          <a:xfrm>
-            <a:off x="1234440" y="3794760"/>
-            <a:ext cx="4434840" cy="502920"/>
-          </a:xfrm>
-          <a:prstGeom prst="rect">
-            <a:avLst/>
-          </a:prstGeom>
-          <a:noFill/>
-          <a:ln/>
-        </p:spPr>
-        <p:txBody>
-          <a:bodyPr wrap="square" rtlCol="0" anchor="ctr"/>
-          <a:lstStyle/>
-          <a:p>
-            <a:pPr marL="0" indent="0">
-              <a:buNone/>
-            </a:pPr>
-            <a:r>
-              <a:rPr lang="en-US" sz="1200" dirty="0" err="1">
-                <a:solidFill>
-                  <a:srgbClr val="1F2937"/>
-                </a:solidFill>
-                <a:latin typeface="Microsoft YaHei" pitchFamily="34" charset="0"/>
-                <a:ea typeface="Microsoft YaHei" pitchFamily="34" charset="-122"/>
-                <a:cs typeface="Microsoft YaHei" pitchFamily="34" charset="-120"/>
-              </a:rPr>
-              <a:t>性能优化仍有提升空间，图谱与检索响应有待提升</a:t>
-            </a:r>
-            <a:endParaRPr lang="en-US" sz="1200" dirty="0"/>
-          </a:p>
-        </p:txBody>
-      </p:sp>
-      <p:sp>
-        <p:nvSpPr>
-          <p:cNvPr id="18" name="Shape 16"/>
-          <p:cNvSpPr/>
-          <p:nvPr/>
-        </p:nvSpPr>
-        <p:spPr>
-          <a:xfrm>
-            <a:off x="731520" y="4663440"/>
-            <a:ext cx="384048" cy="384048"/>
-          </a:xfrm>
-          <a:prstGeom prst="roundRect">
-            <a:avLst>
-              <a:gd name="adj" fmla="val 19048"/>
-            </a:avLst>
-          </a:prstGeom>
-          <a:solidFill>
-            <a:srgbClr val="C69266"/>
-          </a:solidFill>
-          <a:ln w="12700">
-            <a:solidFill>
-              <a:srgbClr val="C69266"/>
-            </a:solidFill>
-            <a:prstDash val="solid"/>
-          </a:ln>
-        </p:spPr>
-        <p:txBody>
-          <a:bodyPr/>
-          <a:lstStyle/>
-          <a:p>
-            <a:endParaRPr lang="zh-CN" altLang="en-US"/>
-          </a:p>
-        </p:txBody>
-      </p:sp>
-      <p:sp>
-        <p:nvSpPr>
-          <p:cNvPr id="19" name="Text 17"/>
-          <p:cNvSpPr/>
-          <p:nvPr/>
-        </p:nvSpPr>
-        <p:spPr>
-          <a:xfrm>
-            <a:off x="731520" y="4663440"/>
-            <a:ext cx="384048" cy="384048"/>
-          </a:xfrm>
-          <a:prstGeom prst="rect">
-            <a:avLst/>
-          </a:prstGeom>
-          <a:noFill/>
-          <a:ln/>
-        </p:spPr>
-        <p:txBody>
-          <a:bodyPr wrap="square" rtlCol="0" anchor="ctr"/>
-          <a:lstStyle/>
-          <a:p>
-            <a:pPr marL="0" indent="0" algn="ctr">
-              <a:buNone/>
-            </a:pPr>
-            <a:r>
-              <a:rPr lang="en-US" sz="1300" b="1" dirty="0">
-                <a:solidFill>
-                  <a:srgbClr val="FFFFFF"/>
-                </a:solidFill>
-                <a:latin typeface="Georgia" pitchFamily="34" charset="0"/>
-                <a:ea typeface="Georgia" pitchFamily="34" charset="-122"/>
-                <a:cs typeface="Georgia" pitchFamily="34" charset="-120"/>
-              </a:rPr>
-              <a:t>4</a:t>
-            </a:r>
-            <a:endParaRPr lang="en-US" sz="1300" dirty="0"/>
-          </a:p>
-        </p:txBody>
-      </p:sp>
-      <p:sp>
-        <p:nvSpPr>
-          <p:cNvPr id="20" name="Text 18"/>
-          <p:cNvSpPr/>
-          <p:nvPr/>
-        </p:nvSpPr>
-        <p:spPr>
-          <a:xfrm>
-            <a:off x="1234440" y="4617720"/>
-            <a:ext cx="4434840" cy="502920"/>
-          </a:xfrm>
-          <a:prstGeom prst="rect">
-            <a:avLst/>
-          </a:prstGeom>
-          <a:noFill/>
-          <a:ln/>
-        </p:spPr>
-        <p:txBody>
-          <a:bodyPr wrap="square" rtlCol="0" anchor="ctr"/>
-          <a:lstStyle/>
-          <a:p>
-            <a:pPr marL="0" indent="0">
-              <a:buNone/>
-            </a:pPr>
-            <a:r>
-              <a:rPr lang="en-US" sz="1200" dirty="0" err="1">
-                <a:solidFill>
-                  <a:srgbClr val="1F2937"/>
-                </a:solidFill>
-                <a:latin typeface="Microsoft YaHei" pitchFamily="34" charset="0"/>
-                <a:ea typeface="Microsoft YaHei" pitchFamily="34" charset="-122"/>
-                <a:cs typeface="Microsoft YaHei" pitchFamily="34" charset="-120"/>
-              </a:rPr>
-              <a:t>缺少</a:t>
-            </a:r>
-            <a:r>
-              <a:rPr lang="zh-CN" altLang="en-US" sz="1200" dirty="0">
-                <a:solidFill>
-                  <a:srgbClr val="1F2937"/>
-                </a:solidFill>
-                <a:latin typeface="Microsoft YaHei" pitchFamily="34" charset="0"/>
-                <a:ea typeface="Microsoft YaHei" pitchFamily="34" charset="-122"/>
-                <a:cs typeface="Microsoft YaHei" pitchFamily="34" charset="-120"/>
-              </a:rPr>
-              <a:t>双链</a:t>
-            </a:r>
-            <a:r>
-              <a:rPr lang="en-US" sz="1200" dirty="0" err="1">
-                <a:solidFill>
-                  <a:srgbClr val="1F2937"/>
-                </a:solidFill>
-                <a:latin typeface="Microsoft YaHei" pitchFamily="34" charset="0"/>
-                <a:ea typeface="Microsoft YaHei" pitchFamily="34" charset="-122"/>
-                <a:cs typeface="Microsoft YaHei" pitchFamily="34" charset="-120"/>
-              </a:rPr>
-              <a:t>块级索引，段落级引用与定位精度不如</a:t>
-            </a:r>
-            <a:r>
-              <a:rPr lang="en-US" sz="1200" dirty="0">
-                <a:solidFill>
-                  <a:srgbClr val="1F2937"/>
-                </a:solidFill>
-                <a:latin typeface="Microsoft YaHei" pitchFamily="34" charset="0"/>
-                <a:ea typeface="Microsoft YaHei" pitchFamily="34" charset="-122"/>
-                <a:cs typeface="Microsoft YaHei" pitchFamily="34" charset="-120"/>
-              </a:rPr>
-              <a:t> Obsidian</a:t>
-            </a:r>
-            <a:endParaRPr lang="en-US" sz="1200" dirty="0"/>
-          </a:p>
-        </p:txBody>
-      </p:sp>
-      <p:sp>
-        <p:nvSpPr>
-          <p:cNvPr id="21" name="Shape 19"/>
-          <p:cNvSpPr/>
-          <p:nvPr/>
-        </p:nvSpPr>
-        <p:spPr>
-          <a:xfrm>
-            <a:off x="6217920" y="1371600"/>
-            <a:ext cx="5486400" cy="4206240"/>
-          </a:xfrm>
-          <a:prstGeom prst="roundRect">
-            <a:avLst>
-              <a:gd name="adj" fmla="val 1739"/>
-            </a:avLst>
-          </a:prstGeom>
-          <a:solidFill>
-            <a:srgbClr val="FFFFFF"/>
-          </a:solidFill>
-          <a:ln w="9525">
-            <a:solidFill>
-              <a:srgbClr val="D9CDBF"/>
-            </a:solidFill>
-            <a:prstDash val="solid"/>
-          </a:ln>
-        </p:spPr>
-        <p:txBody>
-          <a:bodyPr/>
-          <a:lstStyle/>
-          <a:p>
-            <a:endParaRPr lang="zh-CN" altLang="en-US"/>
-          </a:p>
-        </p:txBody>
-      </p:sp>
-      <p:sp>
-        <p:nvSpPr>
-          <p:cNvPr id="22" name="Shape 20"/>
-          <p:cNvSpPr/>
-          <p:nvPr/>
-        </p:nvSpPr>
-        <p:spPr>
-          <a:xfrm>
-            <a:off x="6217920" y="1371600"/>
-            <a:ext cx="5486400" cy="91440"/>
-          </a:xfrm>
-          <a:prstGeom prst="rect">
-            <a:avLst/>
-          </a:prstGeom>
-          <a:solidFill>
-            <a:srgbClr val="1A2B5C"/>
-          </a:solidFill>
-          <a:ln w="12700">
-            <a:solidFill>
-              <a:srgbClr val="1A2B5C"/>
-            </a:solidFill>
-            <a:prstDash val="solid"/>
-          </a:ln>
-        </p:spPr>
-        <p:txBody>
-          <a:bodyPr/>
-          <a:lstStyle/>
-          <a:p>
-            <a:endParaRPr lang="zh-CN" altLang="en-US"/>
-          </a:p>
-        </p:txBody>
-      </p:sp>
-      <p:sp>
-        <p:nvSpPr>
-          <p:cNvPr id="23" name="Text 21"/>
-          <p:cNvSpPr/>
-          <p:nvPr/>
-        </p:nvSpPr>
-        <p:spPr>
-          <a:xfrm>
-            <a:off x="6492240" y="1600200"/>
-            <a:ext cx="4937760" cy="457200"/>
-          </a:xfrm>
-          <a:prstGeom prst="rect">
-            <a:avLst/>
-          </a:prstGeom>
-          <a:noFill/>
-          <a:ln/>
-        </p:spPr>
-        <p:txBody>
-          <a:bodyPr wrap="square" rtlCol="0" anchor="ctr"/>
-          <a:lstStyle/>
-          <a:p>
-            <a:pPr marL="0" indent="0">
-              <a:buNone/>
-            </a:pPr>
-            <a:r>
-              <a:rPr lang="en-US" sz="1800" b="1" dirty="0">
-                <a:solidFill>
-                  <a:srgbClr val="1A2B5C"/>
-                </a:solidFill>
-                <a:latin typeface="Microsoft YaHei" pitchFamily="34" charset="0"/>
-                <a:ea typeface="Microsoft YaHei" pitchFamily="34" charset="-122"/>
-                <a:cs typeface="Microsoft YaHei" pitchFamily="34" charset="-120"/>
-              </a:rPr>
-              <a:t>后续优化</a:t>
-            </a:r>
-            <a:endParaRPr lang="en-US" sz="1800" dirty="0"/>
-          </a:p>
-        </p:txBody>
-      </p:sp>
-      <p:sp>
-        <p:nvSpPr>
-          <p:cNvPr id="24" name="Shape 22"/>
-          <p:cNvSpPr/>
-          <p:nvPr/>
-        </p:nvSpPr>
-        <p:spPr>
-          <a:xfrm>
-            <a:off x="6492240" y="2194560"/>
-            <a:ext cx="384048" cy="384048"/>
-          </a:xfrm>
-          <a:prstGeom prst="roundRect">
-            <a:avLst>
-              <a:gd name="adj" fmla="val 19048"/>
-            </a:avLst>
-          </a:prstGeom>
-          <a:solidFill>
-            <a:srgbClr val="1A2B5C"/>
-          </a:solidFill>
-          <a:ln w="12700">
-            <a:solidFill>
-              <a:srgbClr val="1A2B5C"/>
-            </a:solidFill>
-            <a:prstDash val="solid"/>
-          </a:ln>
-        </p:spPr>
-        <p:txBody>
-          <a:bodyPr/>
-          <a:lstStyle/>
-          <a:p>
-            <a:endParaRPr lang="zh-CN" altLang="en-US"/>
-          </a:p>
-        </p:txBody>
-      </p:sp>
-      <p:sp>
-        <p:nvSpPr>
-          <p:cNvPr id="25" name="Text 23"/>
-          <p:cNvSpPr/>
-          <p:nvPr/>
-        </p:nvSpPr>
-        <p:spPr>
-          <a:xfrm>
-            <a:off x="6492240" y="2194560"/>
-            <a:ext cx="384048" cy="384048"/>
-          </a:xfrm>
-          <a:prstGeom prst="rect">
-            <a:avLst/>
-          </a:prstGeom>
-          <a:noFill/>
-          <a:ln/>
-        </p:spPr>
-        <p:txBody>
-          <a:bodyPr wrap="square" rtlCol="0" anchor="ctr"/>
-          <a:lstStyle/>
-          <a:p>
-            <a:pPr marL="0" indent="0" algn="ctr">
-              <a:buNone/>
-            </a:pPr>
-            <a:r>
-              <a:rPr lang="en-US" sz="1300" b="1" dirty="0">
-                <a:solidFill>
-                  <a:srgbClr val="FFFFFF"/>
-                </a:solidFill>
-                <a:latin typeface="Georgia" pitchFamily="34" charset="0"/>
-                <a:ea typeface="Georgia" pitchFamily="34" charset="-122"/>
-                <a:cs typeface="Georgia" pitchFamily="34" charset="-120"/>
-              </a:rPr>
-              <a:t>1</a:t>
-            </a:r>
-            <a:endParaRPr lang="en-US" sz="1300" dirty="0"/>
-          </a:p>
-        </p:txBody>
-      </p:sp>
-      <p:sp>
-        <p:nvSpPr>
-          <p:cNvPr id="26" name="Text 24"/>
-          <p:cNvSpPr/>
-          <p:nvPr/>
-        </p:nvSpPr>
-        <p:spPr>
-          <a:xfrm>
-            <a:off x="6995160" y="2148840"/>
-            <a:ext cx="4434840" cy="502920"/>
-          </a:xfrm>
-          <a:prstGeom prst="rect">
-            <a:avLst/>
-          </a:prstGeom>
-          <a:noFill/>
-          <a:ln/>
-        </p:spPr>
-        <p:txBody>
-          <a:bodyPr wrap="square" rtlCol="0" anchor="ctr"/>
-          <a:lstStyle/>
-          <a:p>
-            <a:pPr marL="0" indent="0">
-              <a:buNone/>
-            </a:pPr>
-            <a:r>
-              <a:rPr lang="en-US" sz="1200" dirty="0">
-                <a:solidFill>
-                  <a:srgbClr val="1F2937"/>
-                </a:solidFill>
-                <a:latin typeface="Microsoft YaHei" pitchFamily="34" charset="0"/>
-                <a:ea typeface="Microsoft YaHei" pitchFamily="34" charset="-122"/>
-                <a:cs typeface="Microsoft YaHei" pitchFamily="34" charset="-120"/>
-              </a:rPr>
-              <a:t>完成回收站、恢复与彻底删除闭环</a:t>
-            </a:r>
-            <a:endParaRPr lang="en-US" sz="1200" dirty="0"/>
-          </a:p>
-        </p:txBody>
-      </p:sp>
-      <p:sp>
-        <p:nvSpPr>
-          <p:cNvPr id="27" name="Shape 25"/>
-          <p:cNvSpPr/>
-          <p:nvPr/>
-        </p:nvSpPr>
-        <p:spPr>
-          <a:xfrm>
-            <a:off x="6492240" y="3017520"/>
-            <a:ext cx="384048" cy="384048"/>
-          </a:xfrm>
-          <a:prstGeom prst="roundRect">
-            <a:avLst>
-              <a:gd name="adj" fmla="val 19048"/>
-            </a:avLst>
-          </a:prstGeom>
-          <a:solidFill>
-            <a:srgbClr val="1A2B5C"/>
-          </a:solidFill>
-          <a:ln w="12700">
-            <a:solidFill>
-              <a:srgbClr val="1A2B5C"/>
-            </a:solidFill>
-            <a:prstDash val="solid"/>
-          </a:ln>
-        </p:spPr>
-        <p:txBody>
-          <a:bodyPr/>
-          <a:lstStyle/>
-          <a:p>
-            <a:endParaRPr lang="zh-CN" altLang="en-US"/>
-          </a:p>
-        </p:txBody>
-      </p:sp>
-      <p:sp>
-        <p:nvSpPr>
-          <p:cNvPr id="28" name="Text 26"/>
-          <p:cNvSpPr/>
-          <p:nvPr/>
-        </p:nvSpPr>
-        <p:spPr>
-          <a:xfrm>
-            <a:off x="6492240" y="3017520"/>
-            <a:ext cx="384048" cy="384048"/>
-          </a:xfrm>
-          <a:prstGeom prst="rect">
-            <a:avLst/>
-          </a:prstGeom>
-          <a:noFill/>
-          <a:ln/>
-        </p:spPr>
-        <p:txBody>
-          <a:bodyPr wrap="square" rtlCol="0" anchor="ctr"/>
-          <a:lstStyle/>
-          <a:p>
-            <a:pPr marL="0" indent="0" algn="ctr">
-              <a:buNone/>
-            </a:pPr>
-            <a:r>
-              <a:rPr lang="en-US" sz="1300" b="1" dirty="0">
-                <a:solidFill>
-                  <a:srgbClr val="FFFFFF"/>
-                </a:solidFill>
-                <a:latin typeface="Georgia" pitchFamily="34" charset="0"/>
-                <a:ea typeface="Georgia" pitchFamily="34" charset="-122"/>
-                <a:cs typeface="Georgia" pitchFamily="34" charset="-120"/>
-              </a:rPr>
-              <a:t>2</a:t>
-            </a:r>
-            <a:endParaRPr lang="en-US" sz="1300" dirty="0"/>
-          </a:p>
-        </p:txBody>
-      </p:sp>
-      <p:sp>
-        <p:nvSpPr>
-          <p:cNvPr id="29" name="Text 27"/>
-          <p:cNvSpPr/>
-          <p:nvPr/>
-        </p:nvSpPr>
-        <p:spPr>
-          <a:xfrm>
-            <a:off x="6995160" y="2971800"/>
-            <a:ext cx="4434840" cy="502920"/>
-          </a:xfrm>
-          <a:prstGeom prst="rect">
-            <a:avLst/>
-          </a:prstGeom>
-          <a:noFill/>
-          <a:ln/>
-        </p:spPr>
-        <p:txBody>
-          <a:bodyPr wrap="square" rtlCol="0" anchor="ctr"/>
-          <a:lstStyle/>
-          <a:p>
-            <a:pPr marL="0" indent="0">
-              <a:buNone/>
-            </a:pPr>
-            <a:r>
-              <a:rPr lang="en-US" sz="1200" dirty="0">
-                <a:solidFill>
-                  <a:srgbClr val="1F2937"/>
-                </a:solidFill>
-                <a:latin typeface="Microsoft YaHei" pitchFamily="34" charset="0"/>
-                <a:ea typeface="Microsoft YaHei" pitchFamily="34" charset="-122"/>
-                <a:cs typeface="Microsoft YaHei" pitchFamily="34" charset="-120"/>
-              </a:rPr>
-              <a:t>增加局部关系图、知识路径探索与版本差异对比</a:t>
-            </a:r>
-            <a:endParaRPr lang="en-US" sz="1200" dirty="0"/>
-          </a:p>
-        </p:txBody>
-      </p:sp>
-      <p:sp>
-        <p:nvSpPr>
-          <p:cNvPr id="30" name="Shape 28"/>
-          <p:cNvSpPr/>
-          <p:nvPr/>
-        </p:nvSpPr>
-        <p:spPr>
-          <a:xfrm>
-            <a:off x="6492240" y="3840480"/>
-            <a:ext cx="384048" cy="384048"/>
-          </a:xfrm>
-          <a:prstGeom prst="roundRect">
-            <a:avLst>
-              <a:gd name="adj" fmla="val 19048"/>
-            </a:avLst>
-          </a:prstGeom>
-          <a:solidFill>
-            <a:srgbClr val="1A2B5C"/>
-          </a:solidFill>
-          <a:ln w="12700">
-            <a:solidFill>
-              <a:srgbClr val="1A2B5C"/>
-            </a:solidFill>
-            <a:prstDash val="solid"/>
-          </a:ln>
-        </p:spPr>
-        <p:txBody>
-          <a:bodyPr/>
-          <a:lstStyle/>
-          <a:p>
-            <a:endParaRPr lang="zh-CN" altLang="en-US"/>
-          </a:p>
-        </p:txBody>
-      </p:sp>
-      <p:sp>
-        <p:nvSpPr>
-          <p:cNvPr id="31" name="Text 29"/>
-          <p:cNvSpPr/>
-          <p:nvPr/>
-        </p:nvSpPr>
-        <p:spPr>
-          <a:xfrm>
-            <a:off x="6492240" y="3840480"/>
-            <a:ext cx="384048" cy="384048"/>
-          </a:xfrm>
-          <a:prstGeom prst="rect">
-            <a:avLst/>
-          </a:prstGeom>
-          <a:noFill/>
-          <a:ln/>
-        </p:spPr>
-        <p:txBody>
-          <a:bodyPr wrap="square" rtlCol="0" anchor="ctr"/>
-          <a:lstStyle/>
-          <a:p>
-            <a:pPr marL="0" indent="0" algn="ctr">
-              <a:buNone/>
-            </a:pPr>
-            <a:r>
-              <a:rPr lang="en-US" sz="1300" b="1" dirty="0">
-                <a:solidFill>
-                  <a:srgbClr val="FFFFFF"/>
-                </a:solidFill>
-                <a:latin typeface="Georgia" pitchFamily="34" charset="0"/>
-                <a:ea typeface="Georgia" pitchFamily="34" charset="-122"/>
-                <a:cs typeface="Georgia" pitchFamily="34" charset="-120"/>
-              </a:rPr>
-              <a:t>3</a:t>
-            </a:r>
-            <a:endParaRPr lang="en-US" sz="1300" dirty="0"/>
-          </a:p>
-        </p:txBody>
-      </p:sp>
-      <p:sp>
-        <p:nvSpPr>
-          <p:cNvPr id="32" name="Text 30"/>
-          <p:cNvSpPr/>
-          <p:nvPr/>
-        </p:nvSpPr>
-        <p:spPr>
-          <a:xfrm>
-            <a:off x="6995160" y="3794760"/>
-            <a:ext cx="4434840" cy="502920"/>
-          </a:xfrm>
-          <a:prstGeom prst="rect">
-            <a:avLst/>
-          </a:prstGeom>
-          <a:noFill/>
-          <a:ln/>
-        </p:spPr>
-        <p:txBody>
-          <a:bodyPr wrap="square" rtlCol="0" anchor="ctr"/>
-          <a:lstStyle/>
-          <a:p>
-            <a:pPr marL="0" indent="0">
-              <a:buNone/>
-            </a:pPr>
-            <a:r>
-              <a:rPr lang="en-US" sz="1200">
-                <a:solidFill>
-                  <a:srgbClr val="1F2937"/>
-                </a:solidFill>
-                <a:latin typeface="Microsoft YaHei" pitchFamily="34" charset="0"/>
-                <a:ea typeface="Microsoft YaHei" pitchFamily="34" charset="-122"/>
-                <a:cs typeface="Microsoft YaHei" pitchFamily="34" charset="-120"/>
-              </a:rPr>
-              <a:t>引入缓存与索引调优，提升图谱渲染与检索响应</a:t>
-            </a:r>
-            <a:endParaRPr lang="en-US" sz="1200" dirty="0"/>
-          </a:p>
-        </p:txBody>
-      </p:sp>
-      <p:sp>
-        <p:nvSpPr>
-          <p:cNvPr id="33" name="Shape 31"/>
-          <p:cNvSpPr/>
-          <p:nvPr/>
-        </p:nvSpPr>
-        <p:spPr>
-          <a:xfrm>
-            <a:off x="6492240" y="4663440"/>
-            <a:ext cx="384048" cy="384048"/>
-          </a:xfrm>
-          <a:prstGeom prst="roundRect">
-            <a:avLst>
-              <a:gd name="adj" fmla="val 19048"/>
-            </a:avLst>
-          </a:prstGeom>
-          <a:solidFill>
-            <a:srgbClr val="1A2B5C"/>
-          </a:solidFill>
-          <a:ln w="12700">
-            <a:solidFill>
-              <a:srgbClr val="1A2B5C"/>
-            </a:solidFill>
-            <a:prstDash val="solid"/>
-          </a:ln>
-        </p:spPr>
-        <p:txBody>
-          <a:bodyPr/>
-          <a:lstStyle/>
-          <a:p>
-            <a:endParaRPr lang="zh-CN" altLang="en-US"/>
-          </a:p>
-        </p:txBody>
-      </p:sp>
-      <p:sp>
-        <p:nvSpPr>
-          <p:cNvPr id="34" name="Text 32"/>
-          <p:cNvSpPr/>
-          <p:nvPr/>
-        </p:nvSpPr>
-        <p:spPr>
-          <a:xfrm>
-            <a:off x="6492240" y="4663440"/>
-            <a:ext cx="384048" cy="384048"/>
-          </a:xfrm>
-          <a:prstGeom prst="rect">
-            <a:avLst/>
-          </a:prstGeom>
-          <a:noFill/>
-          <a:ln/>
-        </p:spPr>
-        <p:txBody>
-          <a:bodyPr wrap="square" rtlCol="0" anchor="ctr"/>
-          <a:lstStyle/>
-          <a:p>
-            <a:pPr marL="0" indent="0" algn="ctr">
-              <a:buNone/>
-            </a:pPr>
-            <a:r>
-              <a:rPr lang="en-US" sz="1300" b="1" dirty="0">
-                <a:solidFill>
-                  <a:srgbClr val="FFFFFF"/>
-                </a:solidFill>
-                <a:latin typeface="Georgia" pitchFamily="34" charset="0"/>
-                <a:ea typeface="Georgia" pitchFamily="34" charset="-122"/>
-                <a:cs typeface="Georgia" pitchFamily="34" charset="-120"/>
-              </a:rPr>
-              <a:t>4</a:t>
-            </a:r>
-            <a:endParaRPr lang="en-US" sz="1300" dirty="0"/>
-          </a:p>
-        </p:txBody>
-      </p:sp>
-      <p:sp>
-        <p:nvSpPr>
-          <p:cNvPr id="35" name="Text 33"/>
-          <p:cNvSpPr/>
-          <p:nvPr/>
-        </p:nvSpPr>
-        <p:spPr>
-          <a:xfrm>
-            <a:off x="6995160" y="4617720"/>
-            <a:ext cx="4434840" cy="502920"/>
-          </a:xfrm>
-          <a:prstGeom prst="rect">
-            <a:avLst/>
-          </a:prstGeom>
-          <a:noFill/>
-          <a:ln/>
-        </p:spPr>
-        <p:txBody>
-          <a:bodyPr wrap="square" rtlCol="0" anchor="ctr"/>
-          <a:lstStyle/>
-          <a:p>
-            <a:pPr marL="0" indent="0">
-              <a:buNone/>
-            </a:pPr>
-            <a:r>
-              <a:rPr lang="en-US" sz="1200" dirty="0" err="1">
-                <a:solidFill>
-                  <a:srgbClr val="1F2937"/>
-                </a:solidFill>
-                <a:latin typeface="Microsoft YaHei" pitchFamily="34" charset="0"/>
-                <a:ea typeface="Microsoft YaHei" pitchFamily="34" charset="-122"/>
-                <a:cs typeface="Microsoft YaHei" pitchFamily="34" charset="-120"/>
-              </a:rPr>
-              <a:t>引入块级</a:t>
-            </a:r>
-            <a:r>
-              <a:rPr lang="en-US" sz="1200" dirty="0">
-                <a:solidFill>
-                  <a:srgbClr val="1F2937"/>
-                </a:solidFill>
-                <a:latin typeface="Microsoft YaHei" pitchFamily="34" charset="0"/>
-                <a:ea typeface="Microsoft YaHei" pitchFamily="34" charset="-122"/>
-                <a:cs typeface="Microsoft YaHei" pitchFamily="34" charset="-120"/>
-              </a:rPr>
-              <a:t> ID 与 [[</a:t>
-            </a:r>
-            <a:r>
-              <a:rPr lang="en-US" sz="1200" dirty="0" err="1">
-                <a:solidFill>
-                  <a:srgbClr val="1F2937"/>
-                </a:solidFill>
-                <a:latin typeface="Microsoft YaHei" pitchFamily="34" charset="0"/>
-                <a:ea typeface="Microsoft YaHei" pitchFamily="34" charset="-122"/>
-                <a:cs typeface="Microsoft YaHei" pitchFamily="34" charset="-120"/>
-              </a:rPr>
-              <a:t>笔记块ID</a:t>
-            </a:r>
-            <a:r>
-              <a:rPr lang="en-US" sz="1200" dirty="0">
-                <a:solidFill>
-                  <a:srgbClr val="1F2937"/>
-                </a:solidFill>
-                <a:latin typeface="Microsoft YaHei" pitchFamily="34" charset="0"/>
-                <a:ea typeface="Microsoft YaHei" pitchFamily="34" charset="-122"/>
-                <a:cs typeface="Microsoft YaHei" pitchFamily="34" charset="-120"/>
-              </a:rPr>
-              <a:t>]] </a:t>
-            </a:r>
-            <a:r>
-              <a:rPr lang="en-US" sz="1200" dirty="0" err="1">
-                <a:solidFill>
-                  <a:srgbClr val="1F2937"/>
-                </a:solidFill>
-                <a:latin typeface="Microsoft YaHei" pitchFamily="34" charset="0"/>
-                <a:ea typeface="Microsoft YaHei" pitchFamily="34" charset="-122"/>
-                <a:cs typeface="Microsoft YaHei" pitchFamily="34" charset="-120"/>
-              </a:rPr>
-              <a:t>语法，支持段落级精确引用</a:t>
-            </a:r>
-            <a:endParaRPr lang="en-US" sz="1200" dirty="0"/>
-          </a:p>
-        </p:txBody>
-      </p:sp>
-      <p:sp>
-        <p:nvSpPr>
-          <p:cNvPr id="36" name="Shape 34"/>
-          <p:cNvSpPr/>
-          <p:nvPr/>
-        </p:nvSpPr>
-        <p:spPr>
-          <a:xfrm>
-            <a:off x="457200" y="5760720"/>
-            <a:ext cx="11277295" cy="640080"/>
-          </a:xfrm>
-          <a:prstGeom prst="roundRect">
-            <a:avLst>
-              <a:gd name="adj" fmla="val 8571"/>
-            </a:avLst>
-          </a:prstGeom>
-          <a:solidFill>
-            <a:srgbClr val="1A2B5C"/>
-          </a:solidFill>
-          <a:ln w="12700">
-            <a:solidFill>
-              <a:srgbClr val="1A2B5C"/>
-            </a:solidFill>
-            <a:prstDash val="solid"/>
-          </a:ln>
-        </p:spPr>
-        <p:txBody>
-          <a:bodyPr/>
-          <a:lstStyle/>
-          <a:p>
-            <a:endParaRPr lang="zh-CN" altLang="en-US"/>
-          </a:p>
-        </p:txBody>
-      </p:sp>
-      <p:sp>
-        <p:nvSpPr>
-          <p:cNvPr id="37" name="Text 35"/>
-          <p:cNvSpPr/>
-          <p:nvPr/>
-        </p:nvSpPr>
-        <p:spPr>
-          <a:xfrm>
-            <a:off x="457200" y="5760720"/>
-            <a:ext cx="11277295" cy="640080"/>
-          </a:xfrm>
-          <a:prstGeom prst="rect">
-            <a:avLst/>
-          </a:prstGeom>
-          <a:noFill/>
-          <a:ln/>
-        </p:spPr>
-        <p:txBody>
-          <a:bodyPr wrap="square" rtlCol="0" anchor="ctr"/>
-          <a:lstStyle/>
-          <a:p>
-            <a:pPr marL="0" indent="0" algn="ctr">
-              <a:buNone/>
-            </a:pPr>
-            <a:r>
-              <a:rPr lang="en-US" sz="1300" dirty="0">
-                <a:solidFill>
-                  <a:srgbClr val="FFFFFF"/>
-                </a:solidFill>
-                <a:latin typeface="Microsoft YaHei" pitchFamily="34" charset="0"/>
-                <a:ea typeface="Microsoft YaHei" pitchFamily="34" charset="-122"/>
-                <a:cs typeface="Microsoft YaHei" pitchFamily="34" charset="-120"/>
-              </a:rPr>
-              <a:t>当前版本已具备核心业务能力，后续工作重点放在工程完善和知识分析能力增强上。</a:t>
-            </a:r>
-            <a:endParaRPr lang="en-US" sz="1300" dirty="0"/>
-          </a:p>
-        </p:txBody>
-      </p:sp>
-      <p:sp>
-        <p:nvSpPr>
-          <p:cNvPr id="38" name="Shape 36"/>
-          <p:cNvSpPr/>
-          <p:nvPr/>
-        </p:nvSpPr>
-        <p:spPr>
-          <a:xfrm>
-            <a:off x="0" y="6629400"/>
-            <a:ext cx="12191695" cy="228600"/>
-          </a:xfrm>
-          <a:prstGeom prst="rect">
-            <a:avLst/>
-          </a:prstGeom>
-          <a:solidFill>
-            <a:srgbClr val="1A2B5C"/>
-          </a:solidFill>
-          <a:ln/>
-        </p:spPr>
-        <p:txBody>
-          <a:bodyPr/>
-          <a:lstStyle/>
-          <a:p>
-            <a:endParaRPr lang="zh-CN" altLang="en-US"/>
-          </a:p>
-        </p:txBody>
-      </p:sp>
-      <p:sp>
-        <p:nvSpPr>
-          <p:cNvPr id="39" name="Text 37"/>
-          <p:cNvSpPr/>
-          <p:nvPr/>
-        </p:nvSpPr>
-        <p:spPr>
-          <a:xfrm>
-            <a:off x="457200" y="6638544"/>
-            <a:ext cx="7315200" cy="219456"/>
-          </a:xfrm>
-          <a:prstGeom prst="rect">
-            <a:avLst/>
-          </a:prstGeom>
-          <a:noFill/>
-          <a:ln/>
-        </p:spPr>
-        <p:txBody>
-          <a:bodyPr wrap="square" rtlCol="0" anchor="ctr"/>
-          <a:lstStyle/>
-          <a:p>
-            <a:pPr marL="0" indent="0">
-              <a:buNone/>
-            </a:pPr>
-            <a:r>
-              <a:rPr lang="en-US" sz="900" dirty="0">
-                <a:solidFill>
-                  <a:srgbClr val="CFD7E8"/>
-                </a:solidFill>
-                <a:latin typeface="Microsoft YaHei" pitchFamily="34" charset="0"/>
-                <a:ea typeface="Microsoft YaHei" pitchFamily="34" charset="-122"/>
-                <a:cs typeface="Microsoft YaHei" pitchFamily="34" charset="-120"/>
-              </a:rPr>
-              <a:t>基于 Spring Boot + Vue 的个人双链笔记系统</a:t>
-            </a:r>
-            <a:endParaRPr lang="en-US" sz="900" dirty="0"/>
-          </a:p>
-        </p:txBody>
-      </p:sp>
-      <p:sp>
-        <p:nvSpPr>
-          <p:cNvPr id="40" name="Text 38"/>
-          <p:cNvSpPr/>
-          <p:nvPr/>
-        </p:nvSpPr>
-        <p:spPr>
-          <a:xfrm>
-            <a:off x="10972800" y="6638544"/>
-            <a:ext cx="731520" cy="219456"/>
-          </a:xfrm>
-          <a:prstGeom prst="rect">
-            <a:avLst/>
-          </a:prstGeom>
-          <a:noFill/>
-          <a:ln/>
-        </p:spPr>
-        <p:txBody>
-          <a:bodyPr wrap="square" rtlCol="0" anchor="ctr"/>
-          <a:lstStyle/>
-          <a:p>
-            <a:pPr marL="0" indent="0" algn="r">
-              <a:buNone/>
-            </a:pPr>
-            <a:r>
-              <a:rPr lang="en-US" sz="900" dirty="0">
-                <a:solidFill>
-                  <a:srgbClr val="CFD7E8"/>
-                </a:solidFill>
-                <a:latin typeface="Microsoft YaHei" pitchFamily="34" charset="0"/>
-                <a:ea typeface="Microsoft YaHei" pitchFamily="34" charset="-122"/>
-                <a:cs typeface="Microsoft YaHei" pitchFamily="34" charset="-120"/>
-              </a:rPr>
-              <a:t>10 / 11</a:t>
             </a:r>
             <a:endParaRPr lang="en-US" sz="900" dirty="0"/>
           </a:p>
